--- a/slides/W4_presentation.pptx
+++ b/slides/W4_presentation.pptx
@@ -19,6 +19,8 @@
     <p:sldId id="267" r:id="rId18"/>
     <p:sldId id="268" r:id="rId19"/>
     <p:sldId id="269" r:id="rId20"/>
+    <p:sldId id="270" r:id="rId21"/>
+    <p:sldId id="271" r:id="rId22"/>
   </p:sldIdLst>
   <p:sldSz cx="12191695" cy="6858000" type="screen4x3"/>
   <p:notesSz cx="6858000" cy="9144000"/>
@@ -3111,14 +3113,221 @@
       <p:grpSpPr/>
       <p:sp>
         <p:nvSpPr>
-          <p:cNvPr id="2" name="TextBox 1"/>
+          <p:cNvPr id="2" name="Oval 1"/>
+          <p:cNvSpPr/>
+          <p:nvPr/>
+        </p:nvSpPr>
+        <p:spPr>
+          <a:xfrm>
+            <a:off x="7315200" y="-914400"/>
+            <a:ext cx="6400800" cy="6400800"/>
+          </a:xfrm>
+          <a:prstGeom prst="ellipse">
+            <a:avLst/>
+          </a:prstGeom>
+          <a:solidFill>
+            <a:srgbClr val="2D3A55"/>
+          </a:solidFill>
+          <a:ln>
+            <a:noFill/>
+          </a:ln>
+        </p:spPr>
+        <p:style>
+          <a:lnRef idx="1">
+            <a:schemeClr val="accent1"/>
+          </a:lnRef>
+          <a:fillRef idx="3">
+            <a:schemeClr val="accent1"/>
+          </a:fillRef>
+          <a:effectRef idx="2">
+            <a:schemeClr val="accent1"/>
+          </a:effectRef>
+          <a:fontRef idx="minor">
+            <a:schemeClr val="lt1"/>
+          </a:fontRef>
+        </p:style>
+        <p:txBody>
+          <a:bodyPr rtlCol="0" anchor="ctr"/>
+          <a:lstStyle/>
+          <a:p>
+            <a:pPr algn="ctr"/>
+          </a:p>
+        </p:txBody>
+      </p:sp>
+      <p:sp>
+        <p:nvSpPr>
+          <p:cNvPr id="3" name="Oval 2"/>
+          <p:cNvSpPr/>
+          <p:nvPr/>
+        </p:nvSpPr>
+        <p:spPr>
+          <a:xfrm>
+            <a:off x="-1828800" y="3657600"/>
+            <a:ext cx="5486400" cy="5486400"/>
+          </a:xfrm>
+          <a:prstGeom prst="ellipse">
+            <a:avLst/>
+          </a:prstGeom>
+          <a:solidFill>
+            <a:srgbClr val="25324A"/>
+          </a:solidFill>
+          <a:ln>
+            <a:noFill/>
+          </a:ln>
+        </p:spPr>
+        <p:style>
+          <a:lnRef idx="1">
+            <a:schemeClr val="accent1"/>
+          </a:lnRef>
+          <a:fillRef idx="3">
+            <a:schemeClr val="accent1"/>
+          </a:fillRef>
+          <a:effectRef idx="2">
+            <a:schemeClr val="accent1"/>
+          </a:effectRef>
+          <a:fontRef idx="minor">
+            <a:schemeClr val="lt1"/>
+          </a:fontRef>
+        </p:style>
+        <p:txBody>
+          <a:bodyPr rtlCol="0" anchor="ctr"/>
+          <a:lstStyle/>
+          <a:p>
+            <a:pPr algn="ctr"/>
+          </a:p>
+        </p:txBody>
+      </p:sp>
+      <p:sp>
+        <p:nvSpPr>
+          <p:cNvPr id="4" name="TextBox 3"/>
           <p:cNvSpPr txBox="1"/>
           <p:nvPr/>
         </p:nvSpPr>
         <p:spPr>
           <a:xfrm>
-            <a:off x="731520" y="1371600"/>
-            <a:ext cx="10058400" cy="1097280"/>
+            <a:off x="914400" y="1097280"/>
+            <a:ext cx="3657600" cy="274320"/>
+          </a:xfrm>
+          <a:prstGeom prst="rect">
+            <a:avLst/>
+          </a:prstGeom>
+          <a:noFill/>
+        </p:spPr>
+        <p:txBody>
+          <a:bodyPr wrap="square" anchor="t">
+            <a:spAutoFit/>
+          </a:bodyPr>
+          <a:lstStyle/>
+          <a:p>
+            <a:pPr algn="l">
+              <a:lnSpc>
+                <a:spcPts val="1300"/>
+              </a:lnSpc>
+              <a:defRPr sz="1100" b="1">
+                <a:solidFill>
+                  <a:srgbClr val="FE7624"/>
+                </a:solidFill>
+                <a:latin typeface="Plus Jakarta Sans"/>
+              </a:defRPr>
+            </a:pPr>
+            <a:r>
+              <a:t>WEEK 4  •  GROUP 9</a:t>
+            </a:r>
+          </a:p>
+        </p:txBody>
+      </p:sp>
+      <p:sp>
+        <p:nvSpPr>
+          <p:cNvPr id="5" name="TextBox 4"/>
+          <p:cNvSpPr txBox="1"/>
+          <p:nvPr/>
+        </p:nvSpPr>
+        <p:spPr>
+          <a:xfrm>
+            <a:off x="914400" y="1645920"/>
+            <a:ext cx="7315200" cy="1371600"/>
+          </a:xfrm>
+          <a:prstGeom prst="rect">
+            <a:avLst/>
+          </a:prstGeom>
+          <a:noFill/>
+        </p:spPr>
+        <p:txBody>
+          <a:bodyPr wrap="square" anchor="t">
+            <a:spAutoFit/>
+          </a:bodyPr>
+          <a:lstStyle/>
+          <a:p>
+            <a:pPr algn="l">
+              <a:lnSpc>
+                <a:spcPts val="4800"/>
+              </a:lnSpc>
+              <a:defRPr sz="4800" b="1">
+                <a:solidFill>
+                  <a:srgbClr val="FFFFFF"/>
+                </a:solidFill>
+                <a:latin typeface="Plus Jakarta Sans"/>
+              </a:defRPr>
+            </a:pPr>
+            <a:r>
+              <a:t>GeekBrain</a:t>
+            </a:r>
+            <a:br/>
+            <a:r>
+              <a:t>AI Assistant.</a:t>
+            </a:r>
+          </a:p>
+        </p:txBody>
+      </p:sp>
+      <p:sp>
+        <p:nvSpPr>
+          <p:cNvPr id="6" name="TextBox 5"/>
+          <p:cNvSpPr txBox="1"/>
+          <p:nvPr/>
+        </p:nvSpPr>
+        <p:spPr>
+          <a:xfrm>
+            <a:off x="914400" y="3474720"/>
+            <a:ext cx="7315200" cy="548640"/>
+          </a:xfrm>
+          <a:prstGeom prst="rect">
+            <a:avLst/>
+          </a:prstGeom>
+          <a:noFill/>
+        </p:spPr>
+        <p:txBody>
+          <a:bodyPr wrap="square" anchor="t">
+            <a:spAutoFit/>
+          </a:bodyPr>
+          <a:lstStyle/>
+          <a:p>
+            <a:pPr algn="l">
+              <a:lnSpc>
+                <a:spcPts val="2600"/>
+              </a:lnSpc>
+              <a:defRPr sz="2200" b="0">
+                <a:solidFill>
+                  <a:srgbClr val="FE7624"/>
+                </a:solidFill>
+                <a:latin typeface="Plus Jakarta Sans"/>
+              </a:defRPr>
+            </a:pPr>
+            <a:r>
+              <a:t>RAG + Tool Calling + Memory</a:t>
+            </a:r>
+          </a:p>
+        </p:txBody>
+      </p:sp>
+      <p:sp>
+        <p:nvSpPr>
+          <p:cNvPr id="7" name="TextBox 6"/>
+          <p:cNvSpPr txBox="1"/>
+          <p:nvPr/>
+        </p:nvSpPr>
+        <p:spPr>
+          <a:xfrm>
+            <a:off x="914400" y="4297680"/>
+            <a:ext cx="9144000" cy="2286000"/>
           </a:xfrm>
           <a:prstGeom prst="rect">
             <a:avLst/>
@@ -3131,197 +3340,80 @@
           </a:bodyPr>
           <a:lstStyle/>
           <a:p>
-            <a:pPr algn="l">
-              <a:defRPr sz="4400" b="1">
-                <a:solidFill>
-                  <a:srgbClr val="FFFFFF"/>
-                </a:solidFill>
-                <a:latin typeface="Calibri"/>
-              </a:defRPr>
-            </a:pPr>
-            <a:r>
-              <a:t>GeekBrain AI Assistant</a:t>
-            </a:r>
-          </a:p>
-        </p:txBody>
-      </p:sp>
-      <p:sp>
-        <p:nvSpPr>
-          <p:cNvPr id="3" name="TextBox 2"/>
-          <p:cNvSpPr txBox="1"/>
-          <p:nvPr/>
-        </p:nvSpPr>
-        <p:spPr>
-          <a:xfrm>
-            <a:off x="731520" y="2468880"/>
-            <a:ext cx="10058400" cy="731520"/>
-          </a:xfrm>
-          <a:prstGeom prst="rect">
-            <a:avLst/>
-          </a:prstGeom>
-          <a:noFill/>
-        </p:spPr>
-        <p:txBody>
-          <a:bodyPr wrap="square">
-            <a:spAutoFit/>
-          </a:bodyPr>
-          <a:lstStyle/>
-          <a:p>
-            <a:pPr algn="l">
-              <a:defRPr sz="2800" b="0">
-                <a:solidFill>
-                  <a:srgbClr val="FE7624"/>
-                </a:solidFill>
-                <a:latin typeface="Calibri"/>
-              </a:defRPr>
-            </a:pPr>
-            <a:r>
-              <a:t>Week 4 — RAG + Tools + Memory</a:t>
-            </a:r>
-          </a:p>
-        </p:txBody>
-      </p:sp>
-      <p:sp>
-        <p:nvSpPr>
-          <p:cNvPr id="4" name="TextBox 3"/>
-          <p:cNvSpPr txBox="1"/>
-          <p:nvPr/>
-        </p:nvSpPr>
-        <p:spPr>
-          <a:xfrm>
-            <a:off x="731520" y="3474720"/>
-            <a:ext cx="10058400" cy="3200400"/>
-          </a:xfrm>
-          <a:prstGeom prst="rect">
-            <a:avLst/>
-          </a:prstGeom>
-          <a:noFill/>
-        </p:spPr>
-        <p:txBody>
-          <a:bodyPr wrap="square">
-            <a:spAutoFit/>
-          </a:bodyPr>
-          <a:lstStyle/>
-          <a:p>
             <a:pPr>
               <a:spcBef>
-                <a:spcPts val="600"/>
+                <a:spcPts val="400"/>
               </a:spcBef>
-              <a:defRPr sz="1600">
+              <a:defRPr sz="1300">
                 <a:solidFill>
                   <a:srgbClr val="C4D5DD"/>
                 </a:solidFill>
-                <a:latin typeface="Calibri"/>
+                <a:latin typeface="Plus Jakarta Sans"/>
               </a:defRPr>
             </a:pPr>
             <a:r>
-              <a:t>Group 9</a:t>
+              <a:t>Le Hoang Trung Kien  •  Tran Dinh Bao Long  •  Nguyen Duc Chinh</a:t>
             </a:r>
           </a:p>
           <a:p>
             <a:pPr>
               <a:spcBef>
-                <a:spcPts val="600"/>
+                <a:spcPts val="400"/>
               </a:spcBef>
-              <a:defRPr sz="1600">
+              <a:defRPr sz="1300">
                 <a:solidFill>
                   <a:srgbClr val="C4D5DD"/>
                 </a:solidFill>
-                <a:latin typeface="Calibri"/>
+                <a:latin typeface="Plus Jakarta Sans"/>
               </a:defRPr>
             </a:pPr>
+            <a:r>
+              <a:t>Nguyen Huu Dinh  •  Truong Thi My Quyen  •  Tran Van Duc  •  Hoang Trong Tan</a:t>
+            </a:r>
           </a:p>
           <a:p>
             <a:pPr>
               <a:spcBef>
-                <a:spcPts val="600"/>
+                <a:spcPts val="400"/>
               </a:spcBef>
-              <a:defRPr sz="1600">
+              <a:defRPr sz="1300">
                 <a:solidFill>
                   <a:srgbClr val="C4D5DD"/>
                 </a:solidFill>
-                <a:latin typeface="Calibri"/>
+                <a:latin typeface="Plus Jakarta Sans"/>
               </a:defRPr>
             </a:pPr>
-            <a:r>
-              <a:t>Le Hoang Trung Kien  •  Tran Dinh Bao Long  •  Nguyen Duc Chinh</a:t>
-            </a:r>
           </a:p>
           <a:p>
             <a:pPr>
               <a:spcBef>
-                <a:spcPts val="600"/>
+                <a:spcPts val="400"/>
               </a:spcBef>
-              <a:defRPr sz="1600">
+              <a:defRPr sz="1300">
                 <a:solidFill>
                   <a:srgbClr val="C4D5DD"/>
                 </a:solidFill>
-                <a:latin typeface="Calibri"/>
+                <a:latin typeface="Plus Jakarta Sans"/>
               </a:defRPr>
             </a:pPr>
             <a:r>
-              <a:t>Nguyen Huu Dinh  •  Truong Thi My Quyen  •  Tran Van Duc  •  Hoang Trong Tan</a:t>
+              <a:t>Mentor: Anh Quang Phung (QA Lead, TechX)</a:t>
             </a:r>
           </a:p>
           <a:p>
             <a:pPr>
               <a:spcBef>
-                <a:spcPts val="600"/>
+                <a:spcPts val="400"/>
               </a:spcBef>
-              <a:defRPr sz="1600">
+              <a:defRPr sz="1300">
                 <a:solidFill>
                   <a:srgbClr val="C4D5DD"/>
                 </a:solidFill>
-                <a:latin typeface="Calibri"/>
+                <a:latin typeface="Plus Jakarta Sans"/>
               </a:defRPr>
             </a:pPr>
-          </a:p>
-          <a:p>
-            <a:pPr>
-              <a:spcBef>
-                <a:spcPts val="600"/>
-              </a:spcBef>
-              <a:defRPr sz="1600">
-                <a:solidFill>
-                  <a:srgbClr val="C4D5DD"/>
-                </a:solidFill>
-                <a:latin typeface="Calibri"/>
-              </a:defRPr>
-            </a:pPr>
-            <a:r>
-              <a:t>Mentor: Anh Quang Phung (Quality Assurance Lead, TechX)</a:t>
-            </a:r>
-          </a:p>
-          <a:p>
-            <a:pPr>
-              <a:spcBef>
-                <a:spcPts val="600"/>
-              </a:spcBef>
-              <a:defRPr sz="1600">
-                <a:solidFill>
-                  <a:srgbClr val="C4D5DD"/>
-                </a:solidFill>
-                <a:latin typeface="Calibri"/>
-              </a:defRPr>
-            </a:pPr>
-            <a:r>
-              <a:t>LLM: DeepSeek V3.2 via Amazon Bedrock</a:t>
-            </a:r>
-          </a:p>
-          <a:p>
-            <a:pPr>
-              <a:spcBef>
-                <a:spcPts val="600"/>
-              </a:spcBef>
-              <a:defRPr sz="1600">
-                <a:solidFill>
-                  <a:srgbClr val="C4D5DD"/>
-                </a:solidFill>
-                <a:latin typeface="Calibri"/>
-              </a:defRPr>
-            </a:pPr>
-            <a:r>
-              <a:t>Framework: Amazon Bedrock Agents (managed orchestration)</a:t>
+            <a:r>
+              <a:t>LLM: DeepSeek V3.2 via Amazon Bedrock  •  Framework: Bedrock Agents</a:t>
             </a:r>
           </a:p>
         </p:txBody>
@@ -3352,8 +3444,8 @@
         </p:nvSpPr>
         <p:spPr>
           <a:xfrm>
-            <a:off x="731520" y="274320"/>
-            <a:ext cx="4572000" cy="365760"/>
+            <a:off x="731520" y="365760"/>
+            <a:ext cx="4572000" cy="274320"/>
           </a:xfrm>
           <a:prstGeom prst="rect">
             <a:avLst/>
@@ -3361,21 +3453,24 @@
           <a:noFill/>
         </p:spPr>
         <p:txBody>
-          <a:bodyPr wrap="square">
+          <a:bodyPr wrap="square" anchor="t">
             <a:spAutoFit/>
           </a:bodyPr>
           <a:lstStyle/>
           <a:p>
             <a:pPr algn="l">
-              <a:defRPr sz="1200" b="1">
-                <a:solidFill>
-                  <a:srgbClr val="85439A"/>
-                </a:solidFill>
-                <a:latin typeface="Calibri"/>
+              <a:lnSpc>
+                <a:spcPts val="1200"/>
+              </a:lnSpc>
+              <a:defRPr sz="1000" b="1">
+                <a:solidFill>
+                  <a:srgbClr val="007BC1"/>
+                </a:solidFill>
+                <a:latin typeface="Plus Jakarta Sans"/>
               </a:defRPr>
             </a:pPr>
             <a:r>
-              <a:t>03 • DEMO L4</a:t>
+              <a:t>L2 • MULTI-SOURCE</a:t>
             </a:r>
           </a:p>
         </p:txBody>
@@ -3388,8 +3483,8 @@
         </p:nvSpPr>
         <p:spPr>
           <a:xfrm>
-            <a:off x="731520" y="640080"/>
-            <a:ext cx="9144000" cy="548640"/>
+            <a:off x="731520" y="731520"/>
+            <a:ext cx="9144000" cy="457200"/>
           </a:xfrm>
           <a:prstGeom prst="rect">
             <a:avLst/>
@@ -3397,21 +3492,24 @@
           <a:noFill/>
         </p:spPr>
         <p:txBody>
-          <a:bodyPr wrap="square">
+          <a:bodyPr wrap="square" anchor="t">
             <a:spAutoFit/>
           </a:bodyPr>
           <a:lstStyle/>
           <a:p>
             <a:pPr algn="l">
-              <a:defRPr sz="3000" b="1">
+              <a:lnSpc>
+                <a:spcPts val="3100"/>
+              </a:lnSpc>
+              <a:defRPr sz="2600" b="1">
                 <a:solidFill>
                   <a:srgbClr val="1E293B"/>
                 </a:solidFill>
-                <a:latin typeface="Calibri"/>
+                <a:latin typeface="Plus Jakarta Sans"/>
               </a:defRPr>
             </a:pPr>
             <a:r>
-              <a:t>L4 — Memory (Multi-turn Conversation)</a:t>
+              <a:t>L2 — Multi-Source Retrieval.</a:t>
             </a:r>
           </a:p>
         </p:txBody>
@@ -3424,8 +3522,8 @@
         </p:nvSpPr>
         <p:spPr>
           <a:xfrm>
-            <a:off x="731520" y="1188720"/>
-            <a:ext cx="9144000" cy="457200"/>
+            <a:off x="731520" y="1234440"/>
+            <a:ext cx="10058400" cy="457200"/>
           </a:xfrm>
           <a:prstGeom prst="rect">
             <a:avLst/>
@@ -3433,28 +3531,31 @@
           <a:noFill/>
         </p:spPr>
         <p:txBody>
-          <a:bodyPr wrap="square">
+          <a:bodyPr wrap="square" anchor="t">
             <a:spAutoFit/>
           </a:bodyPr>
           <a:lstStyle/>
           <a:p>
             <a:pPr algn="l">
-              <a:defRPr sz="1400" b="0">
+              <a:lnSpc>
+                <a:spcPts val="1400"/>
+              </a:lnSpc>
+              <a:defRPr sz="1200" b="0">
                 <a:solidFill>
                   <a:srgbClr val="4D4E4E"/>
                 </a:solidFill>
-                <a:latin typeface="Calibri"/>
+                <a:latin typeface="Plus Jakarta Sans"/>
               </a:defRPr>
             </a:pPr>
             <a:r>
-              <a:t>Bedrock Agent sessionId (TTL: 1800s). Pronouns resolved across turns without user repeating context.</a:t>
+              <a:t>Multi-doc synthesis &amp; conflict resolution. Agent prefers most recent version (status='current' over 'archived')</a:t>
             </a:r>
           </a:p>
         </p:txBody>
       </p:sp>
       <p:pic>
         <p:nvPicPr>
-          <p:cNvPr id="5" name="Picture 4" descr="l4_conversation.png"/>
+          <p:cNvPr id="5" name="Picture 4" descr="l2_answer.png"/>
           <p:cNvPicPr>
             <a:picLocks noChangeAspect="1"/>
           </p:cNvPicPr>
@@ -3468,8 +3569,32 @@
         </p:blipFill>
         <p:spPr>
           <a:xfrm>
-            <a:off x="1371600" y="1828800"/>
-            <a:ext cx="9144000" cy="31812887"/>
+            <a:off x="365760" y="1828800"/>
+            <a:ext cx="5669280" cy="6481286"/>
+          </a:xfrm>
+          <a:prstGeom prst="rect">
+            <a:avLst/>
+          </a:prstGeom>
+        </p:spPr>
+      </p:pic>
+      <p:pic>
+        <p:nvPicPr>
+          <p:cNvPr id="6" name="Picture 5" descr="l2_proof.png"/>
+          <p:cNvPicPr>
+            <a:picLocks noChangeAspect="1"/>
+          </p:cNvPicPr>
+          <p:nvPr/>
+        </p:nvPicPr>
+        <p:blipFill>
+          <a:blip r:embed="rId3"/>
+          <a:stretch>
+            <a:fillRect/>
+          </a:stretch>
+        </p:blipFill>
+        <p:spPr>
+          <a:xfrm>
+            <a:off x="6217920" y="1828800"/>
+            <a:ext cx="5669280" cy="9734618"/>
           </a:xfrm>
           <a:prstGeom prst="rect">
             <a:avLst/>
@@ -3502,8 +3627,8 @@
         </p:nvSpPr>
         <p:spPr>
           <a:xfrm>
-            <a:off x="731520" y="274320"/>
-            <a:ext cx="4572000" cy="365760"/>
+            <a:off x="731520" y="365760"/>
+            <a:ext cx="4572000" cy="274320"/>
           </a:xfrm>
           <a:prstGeom prst="rect">
             <a:avLst/>
@@ -3511,21 +3636,24 @@
           <a:noFill/>
         </p:spPr>
         <p:txBody>
-          <a:bodyPr wrap="square">
+          <a:bodyPr wrap="square" anchor="t">
             <a:spAutoFit/>
           </a:bodyPr>
           <a:lstStyle/>
           <a:p>
             <a:pPr algn="l">
-              <a:defRPr sz="1200" b="1">
+              <a:lnSpc>
+                <a:spcPts val="1200"/>
+              </a:lnSpc>
+              <a:defRPr sz="1000" b="1">
                 <a:solidFill>
                   <a:srgbClr val="FE7624"/>
                 </a:solidFill>
-                <a:latin typeface="Calibri"/>
+                <a:latin typeface="Plus Jakarta Sans"/>
               </a:defRPr>
             </a:pPr>
             <a:r>
-              <a:t>03 • BONUS</a:t>
+              <a:t>L3 • TOOLS</a:t>
             </a:r>
           </a:p>
         </p:txBody>
@@ -3538,8 +3666,8 @@
         </p:nvSpPr>
         <p:spPr>
           <a:xfrm>
-            <a:off x="731520" y="640080"/>
-            <a:ext cx="9144000" cy="548640"/>
+            <a:off x="731520" y="731520"/>
+            <a:ext cx="9144000" cy="457200"/>
           </a:xfrm>
           <a:prstGeom prst="rect">
             <a:avLst/>
@@ -3547,21 +3675,24 @@
           <a:noFill/>
         </p:spPr>
         <p:txBody>
-          <a:bodyPr wrap="square">
+          <a:bodyPr wrap="square" anchor="t">
             <a:spAutoFit/>
           </a:bodyPr>
           <a:lstStyle/>
           <a:p>
             <a:pPr algn="l">
-              <a:defRPr sz="2800" b="1">
+              <a:lnSpc>
+                <a:spcPts val="3100"/>
+              </a:lnSpc>
+              <a:defRPr sz="2600" b="1">
                 <a:solidFill>
                   <a:srgbClr val="1E293B"/>
                 </a:solidFill>
-                <a:latin typeface="Calibri"/>
+                <a:latin typeface="Plus Jakarta Sans"/>
               </a:defRPr>
             </a:pPr>
             <a:r>
-              <a:t>Bonus A — Observability Dashboard (+0.5)</a:t>
+              <a:t>L3 — Tool-Augmented RAG.</a:t>
             </a:r>
           </a:p>
         </p:txBody>
@@ -3574,8 +3705,8 @@
         </p:nvSpPr>
         <p:spPr>
           <a:xfrm>
-            <a:off x="731520" y="1188720"/>
-            <a:ext cx="9144000" cy="457200"/>
+            <a:off x="731520" y="1234440"/>
+            <a:ext cx="10058400" cy="457200"/>
           </a:xfrm>
           <a:prstGeom prst="rect">
             <a:avLst/>
@@ -3583,28 +3714,31 @@
           <a:noFill/>
         </p:spPr>
         <p:txBody>
-          <a:bodyPr wrap="square">
+          <a:bodyPr wrap="square" anchor="t">
             <a:spAutoFit/>
           </a:bodyPr>
           <a:lstStyle/>
           <a:p>
             <a:pPr algn="l">
-              <a:defRPr sz="1400" b="0">
+              <a:lnSpc>
+                <a:spcPts val="1400"/>
+              </a:lnSpc>
+              <a:defRPr sz="1200" b="0">
                 <a:solidFill>
                   <a:srgbClr val="4D4E4E"/>
                 </a:solidFill>
-                <a:latin typeface="Calibri"/>
+                <a:latin typeface="Plus Jakarta Sans"/>
               </a:defRPr>
             </a:pPr>
             <a:r>
-              <a:t>Frontend displays pipeline internals: source tags (green), tool badges (purple), query details, full trace</a:t>
+              <a:t>6 tools: query_database, get_service_metrics, get_service_status, list_services, get_incident_history, compare_services</a:t>
             </a:r>
           </a:p>
         </p:txBody>
       </p:sp>
       <p:pic>
         <p:nvPicPr>
-          <p:cNvPr id="5" name="Picture 4" descr="bonus_a.png"/>
+          <p:cNvPr id="5" name="Picture 4" descr="l3_answer.png"/>
           <p:cNvPicPr>
             <a:picLocks noChangeAspect="1"/>
           </p:cNvPicPr>
@@ -3618,8 +3752,32 @@
         </p:blipFill>
         <p:spPr>
           <a:xfrm>
-            <a:off x="1371600" y="1828800"/>
-            <a:ext cx="9144000" cy="10986655"/>
+            <a:off x="365760" y="1828800"/>
+            <a:ext cx="5669280" cy="6998018"/>
+          </a:xfrm>
+          <a:prstGeom prst="rect">
+            <a:avLst/>
+          </a:prstGeom>
+        </p:spPr>
+      </p:pic>
+      <p:pic>
+        <p:nvPicPr>
+          <p:cNvPr id="6" name="Picture 5" descr="l3_proof.png"/>
+          <p:cNvPicPr>
+            <a:picLocks noChangeAspect="1"/>
+          </p:cNvPicPr>
+          <p:nvPr/>
+        </p:nvPicPr>
+        <p:blipFill>
+          <a:blip r:embed="rId3"/>
+          <a:stretch>
+            <a:fillRect/>
+          </a:stretch>
+        </p:blipFill>
+        <p:spPr>
+          <a:xfrm>
+            <a:off x="6217920" y="1828800"/>
+            <a:ext cx="5669280" cy="10182027"/>
           </a:xfrm>
           <a:prstGeom prst="rect">
             <a:avLst/>
@@ -3652,8 +3810,8 @@
         </p:nvSpPr>
         <p:spPr>
           <a:xfrm>
-            <a:off x="731520" y="274320"/>
-            <a:ext cx="4572000" cy="365760"/>
+            <a:off x="731520" y="365760"/>
+            <a:ext cx="4572000" cy="274320"/>
           </a:xfrm>
           <a:prstGeom prst="rect">
             <a:avLst/>
@@ -3661,21 +3819,24 @@
           <a:noFill/>
         </p:spPr>
         <p:txBody>
-          <a:bodyPr wrap="square">
+          <a:bodyPr wrap="square" anchor="t">
             <a:spAutoFit/>
           </a:bodyPr>
           <a:lstStyle/>
           <a:p>
             <a:pPr algn="l">
-              <a:defRPr sz="1200" b="1">
-                <a:solidFill>
-                  <a:srgbClr val="FE7624"/>
-                </a:solidFill>
-                <a:latin typeface="Calibri"/>
+              <a:lnSpc>
+                <a:spcPts val="1200"/>
+              </a:lnSpc>
+              <a:defRPr sz="1000" b="1">
+                <a:solidFill>
+                  <a:srgbClr val="85439A"/>
+                </a:solidFill>
+                <a:latin typeface="Plus Jakarta Sans"/>
               </a:defRPr>
             </a:pPr>
             <a:r>
-              <a:t>03 • BONUS</a:t>
+              <a:t>L4 • MEMORY</a:t>
             </a:r>
           </a:p>
         </p:txBody>
@@ -3688,8 +3849,8 @@
         </p:nvSpPr>
         <p:spPr>
           <a:xfrm>
-            <a:off x="731520" y="640080"/>
-            <a:ext cx="9144000" cy="548640"/>
+            <a:off x="731520" y="731520"/>
+            <a:ext cx="9144000" cy="457200"/>
           </a:xfrm>
           <a:prstGeom prst="rect">
             <a:avLst/>
@@ -3697,21 +3858,24 @@
           <a:noFill/>
         </p:spPr>
         <p:txBody>
-          <a:bodyPr wrap="square">
+          <a:bodyPr wrap="square" anchor="t">
             <a:spAutoFit/>
           </a:bodyPr>
           <a:lstStyle/>
           <a:p>
             <a:pPr algn="l">
-              <a:defRPr sz="2800" b="1">
+              <a:lnSpc>
+                <a:spcPts val="3100"/>
+              </a:lnSpc>
+              <a:defRPr sz="2600" b="1">
                 <a:solidFill>
                   <a:srgbClr val="1E293B"/>
                 </a:solidFill>
-                <a:latin typeface="Calibri"/>
+                <a:latin typeface="Plus Jakarta Sans"/>
               </a:defRPr>
             </a:pPr>
             <a:r>
-              <a:t>Bonus C — Knowledge Base Sync (+0.5)</a:t>
+              <a:t>L4 — Memory (Multi-turn).</a:t>
             </a:r>
           </a:p>
         </p:txBody>
@@ -3724,8 +3888,8 @@
         </p:nvSpPr>
         <p:spPr>
           <a:xfrm>
-            <a:off x="1097280" y="1645920"/>
-            <a:ext cx="9144000" cy="4572000"/>
+            <a:off x="731520" y="1234440"/>
+            <a:ext cx="10058400" cy="457200"/>
           </a:xfrm>
           <a:prstGeom prst="rect">
             <a:avLst/>
@@ -3733,163 +3897,52 @@
           <a:noFill/>
         </p:spPr>
         <p:txBody>
-          <a:bodyPr wrap="square">
+          <a:bodyPr wrap="square" anchor="t">
             <a:spAutoFit/>
           </a:bodyPr>
           <a:lstStyle/>
           <a:p>
-            <a:pPr>
-              <a:spcBef>
-                <a:spcPts val="600"/>
-              </a:spcBef>
-              <a:defRPr sz="1800">
+            <a:pPr algn="l">
+              <a:lnSpc>
+                <a:spcPts val="1400"/>
+              </a:lnSpc>
+              <a:defRPr sz="1200" b="0">
                 <a:solidFill>
                   <a:srgbClr val="4D4E4E"/>
                 </a:solidFill>
-                <a:latin typeface="Calibri"/>
+                <a:latin typeface="Plus Jakarta Sans"/>
               </a:defRPr>
             </a:pPr>
             <a:r>
-              <a:t>Automated via Terraform — no manual intervention needed</a:t>
-            </a:r>
-          </a:p>
-          <a:p>
-            <a:pPr>
-              <a:spcBef>
-                <a:spcPts val="600"/>
-              </a:spcBef>
-              <a:defRPr sz="1800">
-                <a:solidFill>
-                  <a:srgbClr val="4D4E4E"/>
-                </a:solidFill>
-                <a:latin typeface="Calibri"/>
-              </a:defRPr>
-            </a:pPr>
-          </a:p>
-          <a:p>
-            <a:pPr>
-              <a:spcBef>
-                <a:spcPts val="600"/>
-              </a:spcBef>
-              <a:defRPr sz="1800">
-                <a:solidFill>
-                  <a:srgbClr val="4D4E4E"/>
-                </a:solidFill>
-                <a:latin typeface="Calibri"/>
-              </a:defRPr>
-            </a:pPr>
-            <a:r>
-              <a:t>How it works:</a:t>
-            </a:r>
-          </a:p>
-          <a:p>
-            <a:pPr>
-              <a:spcBef>
-                <a:spcPts val="600"/>
-              </a:spcBef>
-              <a:defRPr sz="1800">
-                <a:solidFill>
-                  <a:srgbClr val="4D4E4E"/>
-                </a:solidFill>
-                <a:latin typeface="Calibri"/>
-              </a:defRPr>
-            </a:pPr>
-            <a:r>
-              <a:t>  1. Upload .md files to S3 (MD5 hash change detected)</a:t>
-            </a:r>
-          </a:p>
-          <a:p>
-            <a:pPr>
-              <a:spcBef>
-                <a:spcPts val="600"/>
-              </a:spcBef>
-              <a:defRPr sz="1800">
-                <a:solidFill>
-                  <a:srgbClr val="4D4E4E"/>
-                </a:solidFill>
-                <a:latin typeface="Calibri"/>
-              </a:defRPr>
-            </a:pPr>
-            <a:r>
-              <a:t>  2. null_resource.kb_sync triggers aws bedrock-agent start-ingestion-job</a:t>
-            </a:r>
-          </a:p>
-          <a:p>
-            <a:pPr>
-              <a:spcBef>
-                <a:spcPts val="600"/>
-              </a:spcBef>
-              <a:defRPr sz="1800">
-                <a:solidFill>
-                  <a:srgbClr val="4D4E4E"/>
-                </a:solidFill>
-                <a:latin typeface="Calibri"/>
-              </a:defRPr>
-            </a:pPr>
-            <a:r>
-              <a:t>  3. Polls until COMPLETE (timeout: 10 min)</a:t>
-            </a:r>
-          </a:p>
-          <a:p>
-            <a:pPr>
-              <a:spcBef>
-                <a:spcPts val="600"/>
-              </a:spcBef>
-              <a:defRPr sz="1800">
-                <a:solidFill>
-                  <a:srgbClr val="4D4E4E"/>
-                </a:solidFill>
-                <a:latin typeface="Calibri"/>
-              </a:defRPr>
-            </a:pPr>
-          </a:p>
-          <a:p>
-            <a:pPr>
-              <a:spcBef>
-                <a:spcPts val="600"/>
-              </a:spcBef>
-              <a:defRPr sz="1800">
-                <a:solidFill>
-                  <a:srgbClr val="4D4E4E"/>
-                </a:solidFill>
-                <a:latin typeface="Calibri"/>
-              </a:defRPr>
-            </a:pPr>
-            <a:r>
-              <a:t>Result: Knowledge Base stays in sync with latest documents</a:t>
-            </a:r>
-          </a:p>
-          <a:p>
-            <a:pPr>
-              <a:spcBef>
-                <a:spcPts val="600"/>
-              </a:spcBef>
-              <a:defRPr sz="1800">
-                <a:solidFill>
-                  <a:srgbClr val="4D4E4E"/>
-                </a:solidFill>
-                <a:latin typeface="Calibri"/>
-              </a:defRPr>
-            </a:pPr>
-          </a:p>
-          <a:p>
-            <a:pPr>
-              <a:spcBef>
-                <a:spcPts val="600"/>
-              </a:spcBef>
-              <a:defRPr sz="1800">
-                <a:solidFill>
-                  <a:srgbClr val="4D4E4E"/>
-                </a:solidFill>
-                <a:latin typeface="Calibri"/>
-              </a:defRPr>
-            </a:pPr>
-            <a:r>
-              <a:t>Evidence: terraform/modules/ai_engine/main.tf — kb_sync resource</a:t>
-            </a:r>
-          </a:p>
-        </p:txBody>
-      </p:sp>
+              <a:t>Bedrock Agent sessionId (TTL: 1800s). Pronouns like "its costs" and "that service" resolved across turns.</a:t>
+            </a:r>
+          </a:p>
+        </p:txBody>
+      </p:sp>
+      <p:pic>
+        <p:nvPicPr>
+          <p:cNvPr id="5" name="Picture 4" descr="l4_conversation.png"/>
+          <p:cNvPicPr>
+            <a:picLocks noChangeAspect="1"/>
+          </p:cNvPicPr>
+          <p:nvPr/>
+        </p:nvPicPr>
+        <p:blipFill>
+          <a:blip r:embed="rId2"/>
+          <a:stretch>
+            <a:fillRect/>
+          </a:stretch>
+        </p:blipFill>
+        <p:spPr>
+          <a:xfrm>
+            <a:off x="1371600" y="1828800"/>
+            <a:ext cx="9418320" cy="32767274"/>
+          </a:xfrm>
+          <a:prstGeom prst="rect">
+            <a:avLst/>
+          </a:prstGeom>
+        </p:spPr>
+      </p:pic>
     </p:spTree>
   </p:cSld>
   <p:clrMapOvr>
@@ -3916,8 +3969,8 @@
         </p:nvSpPr>
         <p:spPr>
           <a:xfrm>
-            <a:off x="731520" y="274320"/>
-            <a:ext cx="4572000" cy="365760"/>
+            <a:off x="731520" y="365760"/>
+            <a:ext cx="4572000" cy="274320"/>
           </a:xfrm>
           <a:prstGeom prst="rect">
             <a:avLst/>
@@ -3925,21 +3978,24 @@
           <a:noFill/>
         </p:spPr>
         <p:txBody>
-          <a:bodyPr wrap="square">
+          <a:bodyPr wrap="square" anchor="t">
             <a:spAutoFit/>
           </a:bodyPr>
           <a:lstStyle/>
           <a:p>
             <a:pPr algn="l">
-              <a:defRPr sz="1200" b="1">
+              <a:lnSpc>
+                <a:spcPts val="1200"/>
+              </a:lnSpc>
+              <a:defRPr sz="1000" b="1">
                 <a:solidFill>
                   <a:srgbClr val="FE7624"/>
                 </a:solidFill>
-                <a:latin typeface="Calibri"/>
+                <a:latin typeface="Plus Jakarta Sans"/>
               </a:defRPr>
             </a:pPr>
             <a:r>
-              <a:t>04 • REFLECTION</a:t>
+              <a:t>BONUS A • OBSERVABILITY</a:t>
             </a:r>
           </a:p>
         </p:txBody>
@@ -3952,8 +4008,8 @@
         </p:nvSpPr>
         <p:spPr>
           <a:xfrm>
-            <a:off x="731520" y="640080"/>
-            <a:ext cx="9144000" cy="548640"/>
+            <a:off x="731520" y="731520"/>
+            <a:ext cx="9144000" cy="457200"/>
           </a:xfrm>
           <a:prstGeom prst="rect">
             <a:avLst/>
@@ -3961,21 +4017,24 @@
           <a:noFill/>
         </p:spPr>
         <p:txBody>
-          <a:bodyPr wrap="square">
+          <a:bodyPr wrap="square" anchor="t">
             <a:spAutoFit/>
           </a:bodyPr>
           <a:lstStyle/>
           <a:p>
             <a:pPr algn="l">
-              <a:defRPr sz="3000" b="1">
+              <a:lnSpc>
+                <a:spcPts val="3100"/>
+              </a:lnSpc>
+              <a:defRPr sz="2600" b="1">
                 <a:solidFill>
                   <a:srgbClr val="1E293B"/>
                 </a:solidFill>
-                <a:latin typeface="Calibri"/>
+                <a:latin typeface="Plus Jakarta Sans"/>
               </a:defRPr>
             </a:pPr>
             <a:r>
-              <a:t>Lessons Learned</a:t>
+              <a:t>Observability Dashboard (+0.5)</a:t>
             </a:r>
           </a:p>
         </p:txBody>
@@ -3988,8 +4047,8 @@
         </p:nvSpPr>
         <p:spPr>
           <a:xfrm>
-            <a:off x="914400" y="1463040"/>
-            <a:ext cx="10058400" cy="5029200"/>
+            <a:off x="731520" y="1234440"/>
+            <a:ext cx="10058400" cy="365760"/>
           </a:xfrm>
           <a:prstGeom prst="rect">
             <a:avLst/>
@@ -3997,198 +4056,52 @@
           <a:noFill/>
         </p:spPr>
         <p:txBody>
-          <a:bodyPr wrap="square">
+          <a:bodyPr wrap="square" anchor="t">
             <a:spAutoFit/>
           </a:bodyPr>
           <a:lstStyle/>
           <a:p>
-            <a:pPr>
-              <a:spcBef>
-                <a:spcPts val="600"/>
-              </a:spcBef>
-              <a:defRPr sz="1700">
+            <a:pPr algn="l">
+              <a:lnSpc>
+                <a:spcPts val="1400"/>
+              </a:lnSpc>
+              <a:defRPr sz="1200" b="0">
                 <a:solidFill>
                   <a:srgbClr val="4D4E4E"/>
                 </a:solidFill>
-                <a:latin typeface="Calibri"/>
+                <a:latin typeface="Plus Jakarta Sans"/>
               </a:defRPr>
             </a:pPr>
             <a:r>
-              <a:t>Hardest Level: L3 — Tool-Augmented RAG</a:t>
-            </a:r>
-          </a:p>
-          <a:p>
-            <a:pPr>
-              <a:spcBef>
-                <a:spcPts val="600"/>
-              </a:spcBef>
-              <a:defRPr sz="1700">
-                <a:solidFill>
-                  <a:srgbClr val="4D4E4E"/>
-                </a:solidFill>
-                <a:latin typeface="Calibri"/>
-              </a:defRPr>
-            </a:pPr>
-          </a:p>
-          <a:p>
-            <a:pPr>
-              <a:spcBef>
-                <a:spcPts val="600"/>
-              </a:spcBef>
-              <a:defRPr sz="1700">
-                <a:solidFill>
-                  <a:srgbClr val="4D4E4E"/>
-                </a:solidFill>
-                <a:latin typeface="Calibri"/>
-              </a:defRPr>
-            </a:pPr>
-            <a:r>
-              <a:t>Why:</a:t>
-            </a:r>
-          </a:p>
-          <a:p>
-            <a:pPr>
-              <a:spcBef>
-                <a:spcPts val="600"/>
-              </a:spcBef>
-              <a:defRPr sz="1700">
-                <a:solidFill>
-                  <a:srgbClr val="4D4E4E"/>
-                </a:solidFill>
-                <a:latin typeface="Calibri"/>
-              </a:defRPr>
-            </a:pPr>
-            <a:r>
-              <a:t>  • Tool descriptions must be extremely precise</a:t>
-            </a:r>
-          </a:p>
-          <a:p>
-            <a:pPr>
-              <a:spcBef>
-                <a:spcPts val="600"/>
-              </a:spcBef>
-              <a:defRPr sz="1700">
-                <a:solidFill>
-                  <a:srgbClr val="4D4E4E"/>
-                </a:solidFill>
-                <a:latin typeface="Calibri"/>
-              </a:defRPr>
-            </a:pPr>
-            <a:r>
-              <a:t>  • "Gets data" is useless — "Returns CURRENT live metrics;</a:t>
-            </a:r>
-          </a:p>
-          <a:p>
-            <a:pPr>
-              <a:spcBef>
-                <a:spcPts val="600"/>
-              </a:spcBef>
-              <a:defRPr sz="1700">
-                <a:solidFill>
-                  <a:srgbClr val="4D4E4E"/>
-                </a:solidFill>
-                <a:latin typeface="Calibri"/>
-              </a:defRPr>
-            </a:pPr>
-            <a:r>
-              <a:t>    for HISTORICAL data use query_database" made the difference</a:t>
-            </a:r>
-          </a:p>
-          <a:p>
-            <a:pPr>
-              <a:spcBef>
-                <a:spcPts val="600"/>
-              </a:spcBef>
-              <a:defRPr sz="1700">
-                <a:solidFill>
-                  <a:srgbClr val="4D4E4E"/>
-                </a:solidFill>
-                <a:latin typeface="Calibri"/>
-              </a:defRPr>
-            </a:pPr>
-            <a:r>
-              <a:t>  • Iterated descriptions multiple times before agent routed correctly</a:t>
-            </a:r>
-          </a:p>
-          <a:p>
-            <a:pPr>
-              <a:spcBef>
-                <a:spcPts val="600"/>
-              </a:spcBef>
-              <a:defRPr sz="1700">
-                <a:solidFill>
-                  <a:srgbClr val="4D4E4E"/>
-                </a:solidFill>
-                <a:latin typeface="Calibri"/>
-              </a:defRPr>
-            </a:pPr>
-          </a:p>
-          <a:p>
-            <a:pPr>
-              <a:spcBef>
-                <a:spcPts val="600"/>
-              </a:spcBef>
-              <a:defRPr sz="1700">
-                <a:solidFill>
-                  <a:srgbClr val="4D4E4E"/>
-                </a:solidFill>
-                <a:latin typeface="Calibri"/>
-              </a:defRPr>
-            </a:pPr>
-            <a:r>
-              <a:t>What we'd do differently with one more day:</a:t>
-            </a:r>
-          </a:p>
-          <a:p>
-            <a:pPr>
-              <a:spcBef>
-                <a:spcPts val="600"/>
-              </a:spcBef>
-              <a:defRPr sz="1700">
-                <a:solidFill>
-                  <a:srgbClr val="4D4E4E"/>
-                </a:solidFill>
-                <a:latin typeface="Calibri"/>
-              </a:defRPr>
-            </a:pPr>
-            <a:r>
-              <a:t>  • Add query rewriting for L4 (pronouns → explicit references)</a:t>
-            </a:r>
-          </a:p>
-          <a:p>
-            <a:pPr>
-              <a:spcBef>
-                <a:spcPts val="600"/>
-              </a:spcBef>
-              <a:defRPr sz="1700">
-                <a:solidFill>
-                  <a:srgbClr val="4D4E4E"/>
-                </a:solidFill>
-                <a:latin typeface="Calibri"/>
-              </a:defRPr>
-            </a:pPr>
-            <a:r>
-              <a:t>  • Implement automated testing with question JSON files</a:t>
-            </a:r>
-          </a:p>
-          <a:p>
-            <a:pPr>
-              <a:spcBef>
-                <a:spcPts val="600"/>
-              </a:spcBef>
-              <a:defRPr sz="1700">
-                <a:solidFill>
-                  <a:srgbClr val="4D4E4E"/>
-                </a:solidFill>
-                <a:latin typeface="Calibri"/>
-              </a:defRPr>
-            </a:pPr>
-            <a:r>
-              <a:t>  • Add fallback error messages when Monitoring API is unreachable</a:t>
-            </a:r>
-          </a:p>
-        </p:txBody>
-      </p:sp>
+              <a:t>Pipeline internals: source tags (green), tool badges (purple), query details, full orchestration trace.</a:t>
+            </a:r>
+          </a:p>
+        </p:txBody>
+      </p:sp>
+      <p:pic>
+        <p:nvPicPr>
+          <p:cNvPr id="5" name="Picture 4" descr="bonus_a.png"/>
+          <p:cNvPicPr>
+            <a:picLocks noChangeAspect="1"/>
+          </p:cNvPicPr>
+          <p:nvPr/>
+        </p:nvPicPr>
+        <p:blipFill>
+          <a:blip r:embed="rId2"/>
+          <a:stretch>
+            <a:fillRect/>
+          </a:stretch>
+        </p:blipFill>
+        <p:spPr>
+          <a:xfrm>
+            <a:off x="1097280" y="1828800"/>
+            <a:ext cx="9875520" cy="11865587"/>
+          </a:xfrm>
+          <a:prstGeom prst="rect">
+            <a:avLst/>
+          </a:prstGeom>
+        </p:spPr>
+      </p:pic>
     </p:spTree>
   </p:cSld>
   <p:clrMapOvr>
@@ -4198,6 +4111,1106 @@
 </file>
 
 <file path=ppt/slides/slide14.xml><?xml version="1.0" encoding="utf-8"?>
+<p:sld xmlns:a="http://schemas.openxmlformats.org/drawingml/2006/main" xmlns:p="http://schemas.openxmlformats.org/presentationml/2006/main" xmlns:r="http://schemas.openxmlformats.org/officeDocument/2006/relationships">
+  <p:cSld>
+    <p:spTree>
+      <p:nvGrpSpPr>
+        <p:cNvPr id="1" name=""/>
+        <p:cNvGrpSpPr/>
+        <p:nvPr/>
+      </p:nvGrpSpPr>
+      <p:grpSpPr/>
+      <p:sp>
+        <p:nvSpPr>
+          <p:cNvPr id="2" name="TextBox 1"/>
+          <p:cNvSpPr txBox="1"/>
+          <p:nvPr/>
+        </p:nvSpPr>
+        <p:spPr>
+          <a:xfrm>
+            <a:off x="731520" y="365760"/>
+            <a:ext cx="4572000" cy="274320"/>
+          </a:xfrm>
+          <a:prstGeom prst="rect">
+            <a:avLst/>
+          </a:prstGeom>
+          <a:noFill/>
+        </p:spPr>
+        <p:txBody>
+          <a:bodyPr wrap="square" anchor="t">
+            <a:spAutoFit/>
+          </a:bodyPr>
+          <a:lstStyle/>
+          <a:p>
+            <a:pPr algn="l">
+              <a:lnSpc>
+                <a:spcPts val="1200"/>
+              </a:lnSpc>
+              <a:defRPr sz="1000" b="1">
+                <a:solidFill>
+                  <a:srgbClr val="FE7624"/>
+                </a:solidFill>
+                <a:latin typeface="Plus Jakarta Sans"/>
+              </a:defRPr>
+            </a:pPr>
+            <a:r>
+              <a:t>BONUS C • KB SYNC</a:t>
+            </a:r>
+          </a:p>
+        </p:txBody>
+      </p:sp>
+      <p:sp>
+        <p:nvSpPr>
+          <p:cNvPr id="3" name="TextBox 2"/>
+          <p:cNvSpPr txBox="1"/>
+          <p:nvPr/>
+        </p:nvSpPr>
+        <p:spPr>
+          <a:xfrm>
+            <a:off x="731520" y="731520"/>
+            <a:ext cx="9144000" cy="457200"/>
+          </a:xfrm>
+          <a:prstGeom prst="rect">
+            <a:avLst/>
+          </a:prstGeom>
+          <a:noFill/>
+        </p:spPr>
+        <p:txBody>
+          <a:bodyPr wrap="square" anchor="t">
+            <a:spAutoFit/>
+          </a:bodyPr>
+          <a:lstStyle/>
+          <a:p>
+            <a:pPr algn="l">
+              <a:lnSpc>
+                <a:spcPts val="3100"/>
+              </a:lnSpc>
+              <a:defRPr sz="2600" b="1">
+                <a:solidFill>
+                  <a:srgbClr val="1E293B"/>
+                </a:solidFill>
+                <a:latin typeface="Plus Jakarta Sans"/>
+              </a:defRPr>
+            </a:pPr>
+            <a:r>
+              <a:t>Knowledge Base Auto-Sync (+0.5)</a:t>
+            </a:r>
+          </a:p>
+        </p:txBody>
+      </p:sp>
+      <p:sp>
+        <p:nvSpPr>
+          <p:cNvPr id="4" name="Rounded Rectangle 3"/>
+          <p:cNvSpPr/>
+          <p:nvPr/>
+        </p:nvSpPr>
+        <p:spPr>
+          <a:xfrm>
+            <a:off x="731520" y="1645920"/>
+            <a:ext cx="3383280" cy="2011680"/>
+          </a:xfrm>
+          <a:prstGeom prst="roundRect">
+            <a:avLst>
+              <a:gd name="adj" fmla="val 5000"/>
+            </a:avLst>
+          </a:prstGeom>
+          <a:solidFill>
+            <a:srgbClr val="F9FAFB"/>
+          </a:solidFill>
+          <a:ln w="19050">
+            <a:solidFill>
+              <a:srgbClr val="FE7624"/>
+            </a:solidFill>
+          </a:ln>
+        </p:spPr>
+        <p:style>
+          <a:lnRef idx="1">
+            <a:schemeClr val="accent1"/>
+          </a:lnRef>
+          <a:fillRef idx="3">
+            <a:schemeClr val="accent1"/>
+          </a:fillRef>
+          <a:effectRef idx="2">
+            <a:schemeClr val="accent1"/>
+          </a:effectRef>
+          <a:fontRef idx="minor">
+            <a:schemeClr val="lt1"/>
+          </a:fontRef>
+        </p:style>
+        <p:txBody>
+          <a:bodyPr rtlCol="0" anchor="ctr"/>
+          <a:lstStyle/>
+          <a:p>
+            <a:pPr algn="ctr"/>
+          </a:p>
+        </p:txBody>
+      </p:sp>
+      <p:sp>
+        <p:nvSpPr>
+          <p:cNvPr id="5" name="Rectangle 4"/>
+          <p:cNvSpPr/>
+          <p:nvPr/>
+        </p:nvSpPr>
+        <p:spPr>
+          <a:xfrm>
+            <a:off x="731520" y="1645920"/>
+            <a:ext cx="3383280" cy="63500"/>
+          </a:xfrm>
+          <a:prstGeom prst="rect">
+            <a:avLst/>
+          </a:prstGeom>
+          <a:solidFill>
+            <a:srgbClr val="FE7624"/>
+          </a:solidFill>
+          <a:ln>
+            <a:noFill/>
+          </a:ln>
+        </p:spPr>
+        <p:style>
+          <a:lnRef idx="1">
+            <a:schemeClr val="accent1"/>
+          </a:lnRef>
+          <a:fillRef idx="3">
+            <a:schemeClr val="accent1"/>
+          </a:fillRef>
+          <a:effectRef idx="2">
+            <a:schemeClr val="accent1"/>
+          </a:effectRef>
+          <a:fontRef idx="minor">
+            <a:schemeClr val="lt1"/>
+          </a:fontRef>
+        </p:style>
+        <p:txBody>
+          <a:bodyPr rtlCol="0" anchor="ctr"/>
+          <a:lstStyle/>
+          <a:p>
+            <a:pPr algn="ctr"/>
+          </a:p>
+        </p:txBody>
+      </p:sp>
+      <p:sp>
+        <p:nvSpPr>
+          <p:cNvPr id="6" name="TextBox 5"/>
+          <p:cNvSpPr txBox="1"/>
+          <p:nvPr/>
+        </p:nvSpPr>
+        <p:spPr>
+          <a:xfrm>
+            <a:off x="914400" y="1874520"/>
+            <a:ext cx="3017520" cy="365760"/>
+          </a:xfrm>
+          <a:prstGeom prst="rect">
+            <a:avLst/>
+          </a:prstGeom>
+          <a:noFill/>
+        </p:spPr>
+        <p:txBody>
+          <a:bodyPr wrap="square" anchor="t">
+            <a:spAutoFit/>
+          </a:bodyPr>
+          <a:lstStyle/>
+          <a:p>
+            <a:pPr algn="l">
+              <a:lnSpc>
+                <a:spcPts val="1400"/>
+              </a:lnSpc>
+              <a:defRPr sz="1200" b="1">
+                <a:solidFill>
+                  <a:srgbClr val="1E293B"/>
+                </a:solidFill>
+                <a:latin typeface="Plus Jakarta Sans"/>
+              </a:defRPr>
+            </a:pPr>
+            <a:r>
+              <a:t>01  Detect Change</a:t>
+            </a:r>
+          </a:p>
+        </p:txBody>
+      </p:sp>
+      <p:sp>
+        <p:nvSpPr>
+          <p:cNvPr id="7" name="TextBox 6"/>
+          <p:cNvSpPr txBox="1"/>
+          <p:nvPr/>
+        </p:nvSpPr>
+        <p:spPr>
+          <a:xfrm>
+            <a:off x="914400" y="2240280"/>
+            <a:ext cx="3017520" cy="1280160"/>
+          </a:xfrm>
+          <a:prstGeom prst="rect">
+            <a:avLst/>
+          </a:prstGeom>
+          <a:noFill/>
+        </p:spPr>
+        <p:txBody>
+          <a:bodyPr wrap="square" anchor="t">
+            <a:spAutoFit/>
+          </a:bodyPr>
+          <a:lstStyle/>
+          <a:p>
+            <a:pPr algn="l">
+              <a:lnSpc>
+                <a:spcPts val="1500"/>
+              </a:lnSpc>
+              <a:defRPr sz="1000" b="0">
+                <a:solidFill>
+                  <a:srgbClr val="4D4E4E"/>
+                </a:solidFill>
+                <a:latin typeface="Plus Jakarta Sans"/>
+              </a:defRPr>
+            </a:pPr>
+            <a:r>
+              <a:t>MD5 hash trigger detects</a:t>
+            </a:r>
+            <a:br/>
+            <a:r>
+              <a:t>.md file updates in S3.</a:t>
+            </a:r>
+          </a:p>
+        </p:txBody>
+      </p:sp>
+      <p:sp>
+        <p:nvSpPr>
+          <p:cNvPr id="8" name="Rounded Rectangle 7"/>
+          <p:cNvSpPr/>
+          <p:nvPr/>
+        </p:nvSpPr>
+        <p:spPr>
+          <a:xfrm>
+            <a:off x="4389120" y="1645920"/>
+            <a:ext cx="3383280" cy="2011680"/>
+          </a:xfrm>
+          <a:prstGeom prst="roundRect">
+            <a:avLst>
+              <a:gd name="adj" fmla="val 5000"/>
+            </a:avLst>
+          </a:prstGeom>
+          <a:solidFill>
+            <a:srgbClr val="F9FAFB"/>
+          </a:solidFill>
+          <a:ln w="19050">
+            <a:solidFill>
+              <a:srgbClr val="007BC1"/>
+            </a:solidFill>
+          </a:ln>
+        </p:spPr>
+        <p:style>
+          <a:lnRef idx="1">
+            <a:schemeClr val="accent1"/>
+          </a:lnRef>
+          <a:fillRef idx="3">
+            <a:schemeClr val="accent1"/>
+          </a:fillRef>
+          <a:effectRef idx="2">
+            <a:schemeClr val="accent1"/>
+          </a:effectRef>
+          <a:fontRef idx="minor">
+            <a:schemeClr val="lt1"/>
+          </a:fontRef>
+        </p:style>
+        <p:txBody>
+          <a:bodyPr rtlCol="0" anchor="ctr"/>
+          <a:lstStyle/>
+          <a:p>
+            <a:pPr algn="ctr"/>
+          </a:p>
+        </p:txBody>
+      </p:sp>
+      <p:sp>
+        <p:nvSpPr>
+          <p:cNvPr id="9" name="Rectangle 8"/>
+          <p:cNvSpPr/>
+          <p:nvPr/>
+        </p:nvSpPr>
+        <p:spPr>
+          <a:xfrm>
+            <a:off x="4389120" y="1645920"/>
+            <a:ext cx="3383280" cy="63500"/>
+          </a:xfrm>
+          <a:prstGeom prst="rect">
+            <a:avLst/>
+          </a:prstGeom>
+          <a:solidFill>
+            <a:srgbClr val="007BC1"/>
+          </a:solidFill>
+          <a:ln>
+            <a:noFill/>
+          </a:ln>
+        </p:spPr>
+        <p:style>
+          <a:lnRef idx="1">
+            <a:schemeClr val="accent1"/>
+          </a:lnRef>
+          <a:fillRef idx="3">
+            <a:schemeClr val="accent1"/>
+          </a:fillRef>
+          <a:effectRef idx="2">
+            <a:schemeClr val="accent1"/>
+          </a:effectRef>
+          <a:fontRef idx="minor">
+            <a:schemeClr val="lt1"/>
+          </a:fontRef>
+        </p:style>
+        <p:txBody>
+          <a:bodyPr rtlCol="0" anchor="ctr"/>
+          <a:lstStyle/>
+          <a:p>
+            <a:pPr algn="ctr"/>
+          </a:p>
+        </p:txBody>
+      </p:sp>
+      <p:sp>
+        <p:nvSpPr>
+          <p:cNvPr id="10" name="TextBox 9"/>
+          <p:cNvSpPr txBox="1"/>
+          <p:nvPr/>
+        </p:nvSpPr>
+        <p:spPr>
+          <a:xfrm>
+            <a:off x="4572000" y="1874520"/>
+            <a:ext cx="3017520" cy="365760"/>
+          </a:xfrm>
+          <a:prstGeom prst="rect">
+            <a:avLst/>
+          </a:prstGeom>
+          <a:noFill/>
+        </p:spPr>
+        <p:txBody>
+          <a:bodyPr wrap="square" anchor="t">
+            <a:spAutoFit/>
+          </a:bodyPr>
+          <a:lstStyle/>
+          <a:p>
+            <a:pPr algn="l">
+              <a:lnSpc>
+                <a:spcPts val="1400"/>
+              </a:lnSpc>
+              <a:defRPr sz="1200" b="1">
+                <a:solidFill>
+                  <a:srgbClr val="1E293B"/>
+                </a:solidFill>
+                <a:latin typeface="Plus Jakarta Sans"/>
+              </a:defRPr>
+            </a:pPr>
+            <a:r>
+              <a:t>02  Start Ingestion</a:t>
+            </a:r>
+          </a:p>
+        </p:txBody>
+      </p:sp>
+      <p:sp>
+        <p:nvSpPr>
+          <p:cNvPr id="11" name="TextBox 10"/>
+          <p:cNvSpPr txBox="1"/>
+          <p:nvPr/>
+        </p:nvSpPr>
+        <p:spPr>
+          <a:xfrm>
+            <a:off x="4572000" y="2240280"/>
+            <a:ext cx="3017520" cy="1280160"/>
+          </a:xfrm>
+          <a:prstGeom prst="rect">
+            <a:avLst/>
+          </a:prstGeom>
+          <a:noFill/>
+        </p:spPr>
+        <p:txBody>
+          <a:bodyPr wrap="square" anchor="t">
+            <a:spAutoFit/>
+          </a:bodyPr>
+          <a:lstStyle/>
+          <a:p>
+            <a:pPr algn="l">
+              <a:lnSpc>
+                <a:spcPts val="1500"/>
+              </a:lnSpc>
+              <a:defRPr sz="1000" b="0">
+                <a:solidFill>
+                  <a:srgbClr val="4D4E4E"/>
+                </a:solidFill>
+                <a:latin typeface="Plus Jakarta Sans"/>
+              </a:defRPr>
+            </a:pPr>
+            <a:r>
+              <a:t>null_resource.kb_sync runs</a:t>
+            </a:r>
+            <a:br/>
+            <a:r>
+              <a:t>aws bedrock-agent</a:t>
+            </a:r>
+            <a:br/>
+            <a:r>
+              <a:t>start-ingestion-job</a:t>
+            </a:r>
+          </a:p>
+        </p:txBody>
+      </p:sp>
+      <p:sp>
+        <p:nvSpPr>
+          <p:cNvPr id="12" name="Rounded Rectangle 11"/>
+          <p:cNvSpPr/>
+          <p:nvPr/>
+        </p:nvSpPr>
+        <p:spPr>
+          <a:xfrm>
+            <a:off x="8046720" y="1645920"/>
+            <a:ext cx="3383280" cy="2011680"/>
+          </a:xfrm>
+          <a:prstGeom prst="roundRect">
+            <a:avLst>
+              <a:gd name="adj" fmla="val 5000"/>
+            </a:avLst>
+          </a:prstGeom>
+          <a:solidFill>
+            <a:srgbClr val="F9FAFB"/>
+          </a:solidFill>
+          <a:ln w="19050">
+            <a:solidFill>
+              <a:srgbClr val="00AC4E"/>
+            </a:solidFill>
+          </a:ln>
+        </p:spPr>
+        <p:style>
+          <a:lnRef idx="1">
+            <a:schemeClr val="accent1"/>
+          </a:lnRef>
+          <a:fillRef idx="3">
+            <a:schemeClr val="accent1"/>
+          </a:fillRef>
+          <a:effectRef idx="2">
+            <a:schemeClr val="accent1"/>
+          </a:effectRef>
+          <a:fontRef idx="minor">
+            <a:schemeClr val="lt1"/>
+          </a:fontRef>
+        </p:style>
+        <p:txBody>
+          <a:bodyPr rtlCol="0" anchor="ctr"/>
+          <a:lstStyle/>
+          <a:p>
+            <a:pPr algn="ctr"/>
+          </a:p>
+        </p:txBody>
+      </p:sp>
+      <p:sp>
+        <p:nvSpPr>
+          <p:cNvPr id="13" name="Rectangle 12"/>
+          <p:cNvSpPr/>
+          <p:nvPr/>
+        </p:nvSpPr>
+        <p:spPr>
+          <a:xfrm>
+            <a:off x="8046720" y="1645920"/>
+            <a:ext cx="3383280" cy="63500"/>
+          </a:xfrm>
+          <a:prstGeom prst="rect">
+            <a:avLst/>
+          </a:prstGeom>
+          <a:solidFill>
+            <a:srgbClr val="00AC4E"/>
+          </a:solidFill>
+          <a:ln>
+            <a:noFill/>
+          </a:ln>
+        </p:spPr>
+        <p:style>
+          <a:lnRef idx="1">
+            <a:schemeClr val="accent1"/>
+          </a:lnRef>
+          <a:fillRef idx="3">
+            <a:schemeClr val="accent1"/>
+          </a:fillRef>
+          <a:effectRef idx="2">
+            <a:schemeClr val="accent1"/>
+          </a:effectRef>
+          <a:fontRef idx="minor">
+            <a:schemeClr val="lt1"/>
+          </a:fontRef>
+        </p:style>
+        <p:txBody>
+          <a:bodyPr rtlCol="0" anchor="ctr"/>
+          <a:lstStyle/>
+          <a:p>
+            <a:pPr algn="ctr"/>
+          </a:p>
+        </p:txBody>
+      </p:sp>
+      <p:sp>
+        <p:nvSpPr>
+          <p:cNvPr id="14" name="TextBox 13"/>
+          <p:cNvSpPr txBox="1"/>
+          <p:nvPr/>
+        </p:nvSpPr>
+        <p:spPr>
+          <a:xfrm>
+            <a:off x="8229600" y="1874520"/>
+            <a:ext cx="3017520" cy="365760"/>
+          </a:xfrm>
+          <a:prstGeom prst="rect">
+            <a:avLst/>
+          </a:prstGeom>
+          <a:noFill/>
+        </p:spPr>
+        <p:txBody>
+          <a:bodyPr wrap="square" anchor="t">
+            <a:spAutoFit/>
+          </a:bodyPr>
+          <a:lstStyle/>
+          <a:p>
+            <a:pPr algn="l">
+              <a:lnSpc>
+                <a:spcPts val="1400"/>
+              </a:lnSpc>
+              <a:defRPr sz="1200" b="1">
+                <a:solidFill>
+                  <a:srgbClr val="1E293B"/>
+                </a:solidFill>
+                <a:latin typeface="Plus Jakarta Sans"/>
+              </a:defRPr>
+            </a:pPr>
+            <a:r>
+              <a:t>03  Poll Complete</a:t>
+            </a:r>
+          </a:p>
+        </p:txBody>
+      </p:sp>
+      <p:sp>
+        <p:nvSpPr>
+          <p:cNvPr id="15" name="TextBox 14"/>
+          <p:cNvSpPr txBox="1"/>
+          <p:nvPr/>
+        </p:nvSpPr>
+        <p:spPr>
+          <a:xfrm>
+            <a:off x="8229600" y="2240280"/>
+            <a:ext cx="3017520" cy="1280160"/>
+          </a:xfrm>
+          <a:prstGeom prst="rect">
+            <a:avLst/>
+          </a:prstGeom>
+          <a:noFill/>
+        </p:spPr>
+        <p:txBody>
+          <a:bodyPr wrap="square" anchor="t">
+            <a:spAutoFit/>
+          </a:bodyPr>
+          <a:lstStyle/>
+          <a:p>
+            <a:pPr algn="l">
+              <a:lnSpc>
+                <a:spcPts val="1500"/>
+              </a:lnSpc>
+              <a:defRPr sz="1000" b="0">
+                <a:solidFill>
+                  <a:srgbClr val="4D4E4E"/>
+                </a:solidFill>
+                <a:latin typeface="Plus Jakarta Sans"/>
+              </a:defRPr>
+            </a:pPr>
+            <a:r>
+              <a:t>Polls until COMPLETE.</a:t>
+            </a:r>
+            <a:br/>
+            <a:r>
+              <a:t>Timeout: 10 min.</a:t>
+            </a:r>
+            <a:br/>
+            <a:r>
+              <a:t>Fully automated via Terraform.</a:t>
+            </a:r>
+          </a:p>
+        </p:txBody>
+      </p:sp>
+      <p:sp>
+        <p:nvSpPr>
+          <p:cNvPr id="16" name="TextBox 15"/>
+          <p:cNvSpPr txBox="1"/>
+          <p:nvPr/>
+        </p:nvSpPr>
+        <p:spPr>
+          <a:xfrm>
+            <a:off x="731520" y="4114800"/>
+            <a:ext cx="10058400" cy="365760"/>
+          </a:xfrm>
+          <a:prstGeom prst="rect">
+            <a:avLst/>
+          </a:prstGeom>
+          <a:noFill/>
+        </p:spPr>
+        <p:txBody>
+          <a:bodyPr wrap="square" anchor="t">
+            <a:spAutoFit/>
+          </a:bodyPr>
+          <a:lstStyle/>
+          <a:p>
+            <a:pPr algn="l">
+              <a:lnSpc>
+                <a:spcPts val="1300"/>
+              </a:lnSpc>
+              <a:defRPr sz="1100" b="0">
+                <a:solidFill>
+                  <a:srgbClr val="698695"/>
+                </a:solidFill>
+                <a:latin typeface="JetBrains Mono"/>
+              </a:defRPr>
+            </a:pPr>
+            <a:r>
+              <a:t>Evidence: terraform/modules/ai_engine/main.tf — kb_sync resource</a:t>
+            </a:r>
+          </a:p>
+        </p:txBody>
+      </p:sp>
+    </p:spTree>
+  </p:cSld>
+  <p:clrMapOvr>
+    <a:masterClrMapping/>
+  </p:clrMapOvr>
+</p:sld>
+</file>
+
+<file path=ppt/slides/slide15.xml><?xml version="1.0" encoding="utf-8"?>
+<p:sld xmlns:a="http://schemas.openxmlformats.org/drawingml/2006/main" xmlns:p="http://schemas.openxmlformats.org/presentationml/2006/main" xmlns:r="http://schemas.openxmlformats.org/officeDocument/2006/relationships">
+  <p:cSld>
+    <p:spTree>
+      <p:nvGrpSpPr>
+        <p:cNvPr id="1" name=""/>
+        <p:cNvGrpSpPr/>
+        <p:nvPr/>
+      </p:nvGrpSpPr>
+      <p:grpSpPr/>
+      <p:sp>
+        <p:nvSpPr>
+          <p:cNvPr id="2" name="TextBox 1"/>
+          <p:cNvSpPr txBox="1"/>
+          <p:nvPr/>
+        </p:nvSpPr>
+        <p:spPr>
+          <a:xfrm>
+            <a:off x="731520" y="365760"/>
+            <a:ext cx="4572000" cy="274320"/>
+          </a:xfrm>
+          <a:prstGeom prst="rect">
+            <a:avLst/>
+          </a:prstGeom>
+          <a:noFill/>
+        </p:spPr>
+        <p:txBody>
+          <a:bodyPr wrap="square" anchor="t">
+            <a:spAutoFit/>
+          </a:bodyPr>
+          <a:lstStyle/>
+          <a:p>
+            <a:pPr algn="l">
+              <a:lnSpc>
+                <a:spcPts val="1200"/>
+              </a:lnSpc>
+              <a:defRPr sz="1000" b="1">
+                <a:solidFill>
+                  <a:srgbClr val="FE7624"/>
+                </a:solidFill>
+                <a:latin typeface="Plus Jakarta Sans"/>
+              </a:defRPr>
+            </a:pPr>
+            <a:r>
+              <a:t>04 • REFLECTION</a:t>
+            </a:r>
+          </a:p>
+        </p:txBody>
+      </p:sp>
+      <p:sp>
+        <p:nvSpPr>
+          <p:cNvPr id="3" name="TextBox 2"/>
+          <p:cNvSpPr txBox="1"/>
+          <p:nvPr/>
+        </p:nvSpPr>
+        <p:spPr>
+          <a:xfrm>
+            <a:off x="731520" y="731520"/>
+            <a:ext cx="7315200" cy="548640"/>
+          </a:xfrm>
+          <a:prstGeom prst="rect">
+            <a:avLst/>
+          </a:prstGeom>
+          <a:noFill/>
+        </p:spPr>
+        <p:txBody>
+          <a:bodyPr wrap="square" anchor="t">
+            <a:spAutoFit/>
+          </a:bodyPr>
+          <a:lstStyle/>
+          <a:p>
+            <a:pPr algn="l">
+              <a:lnSpc>
+                <a:spcPts val="3300"/>
+              </a:lnSpc>
+              <a:defRPr sz="2800" b="1">
+                <a:solidFill>
+                  <a:srgbClr val="1E293B"/>
+                </a:solidFill>
+                <a:latin typeface="Plus Jakarta Sans"/>
+              </a:defRPr>
+            </a:pPr>
+            <a:r>
+              <a:t>Lessons Learned.</a:t>
+            </a:r>
+          </a:p>
+        </p:txBody>
+      </p:sp>
+      <p:sp>
+        <p:nvSpPr>
+          <p:cNvPr id="4" name="Rounded Rectangle 3"/>
+          <p:cNvSpPr/>
+          <p:nvPr/>
+        </p:nvSpPr>
+        <p:spPr>
+          <a:xfrm>
+            <a:off x="731520" y="1645920"/>
+            <a:ext cx="5212080" cy="4572000"/>
+          </a:xfrm>
+          <a:prstGeom prst="roundRect">
+            <a:avLst>
+              <a:gd name="adj" fmla="val 5000"/>
+            </a:avLst>
+          </a:prstGeom>
+          <a:solidFill>
+            <a:srgbClr val="1E293B"/>
+          </a:solidFill>
+          <a:ln w="19050">
+            <a:solidFill>
+              <a:srgbClr val="C4D5DD"/>
+            </a:solidFill>
+          </a:ln>
+        </p:spPr>
+        <p:style>
+          <a:lnRef idx="1">
+            <a:schemeClr val="accent1"/>
+          </a:lnRef>
+          <a:fillRef idx="3">
+            <a:schemeClr val="accent1"/>
+          </a:fillRef>
+          <a:effectRef idx="2">
+            <a:schemeClr val="accent1"/>
+          </a:effectRef>
+          <a:fontRef idx="minor">
+            <a:schemeClr val="lt1"/>
+          </a:fontRef>
+        </p:style>
+        <p:txBody>
+          <a:bodyPr rtlCol="0" anchor="ctr"/>
+          <a:lstStyle/>
+          <a:p>
+            <a:pPr algn="ctr"/>
+          </a:p>
+        </p:txBody>
+      </p:sp>
+      <p:sp>
+        <p:nvSpPr>
+          <p:cNvPr id="5" name="TextBox 4"/>
+          <p:cNvSpPr txBox="1"/>
+          <p:nvPr/>
+        </p:nvSpPr>
+        <p:spPr>
+          <a:xfrm>
+            <a:off x="914400" y="1874520"/>
+            <a:ext cx="4846320" cy="365760"/>
+          </a:xfrm>
+          <a:prstGeom prst="rect">
+            <a:avLst/>
+          </a:prstGeom>
+          <a:noFill/>
+        </p:spPr>
+        <p:txBody>
+          <a:bodyPr wrap="square" anchor="t">
+            <a:spAutoFit/>
+          </a:bodyPr>
+          <a:lstStyle/>
+          <a:p>
+            <a:pPr algn="l">
+              <a:lnSpc>
+                <a:spcPts val="1400"/>
+              </a:lnSpc>
+              <a:defRPr sz="1200" b="1">
+                <a:solidFill>
+                  <a:srgbClr val="FFFFFF"/>
+                </a:solidFill>
+                <a:latin typeface="Plus Jakarta Sans"/>
+              </a:defRPr>
+            </a:pPr>
+            <a:r>
+              <a:t>Hardest Level: L3</a:t>
+            </a:r>
+          </a:p>
+        </p:txBody>
+      </p:sp>
+      <p:sp>
+        <p:nvSpPr>
+          <p:cNvPr id="6" name="TextBox 5"/>
+          <p:cNvSpPr txBox="1"/>
+          <p:nvPr/>
+        </p:nvSpPr>
+        <p:spPr>
+          <a:xfrm>
+            <a:off x="914400" y="2240280"/>
+            <a:ext cx="4846320" cy="3840480"/>
+          </a:xfrm>
+          <a:prstGeom prst="rect">
+            <a:avLst/>
+          </a:prstGeom>
+          <a:noFill/>
+        </p:spPr>
+        <p:txBody>
+          <a:bodyPr wrap="square" anchor="t">
+            <a:spAutoFit/>
+          </a:bodyPr>
+          <a:lstStyle/>
+          <a:p>
+            <a:pPr algn="l">
+              <a:lnSpc>
+                <a:spcPts val="1500"/>
+              </a:lnSpc>
+              <a:defRPr sz="1000" b="0">
+                <a:solidFill>
+                  <a:srgbClr val="C4D5DD"/>
+                </a:solidFill>
+                <a:latin typeface="Plus Jakarta Sans"/>
+              </a:defRPr>
+            </a:pPr>
+            <a:r>
+              <a:t>Tool descriptions must be</a:t>
+            </a:r>
+            <a:br/>
+            <a:r>
+              <a:t>extremely precise.</a:t>
+            </a:r>
+            <a:br/>
+            <a:br/>
+            <a:r>
+              <a:t>"Gets data" → useless.</a:t>
+            </a:r>
+            <a:br/>
+            <a:r>
+              <a:t>"Returns CURRENT live metrics;</a:t>
+            </a:r>
+            <a:br/>
+            <a:r>
+              <a:t>for HISTORICAL data use</a:t>
+            </a:r>
+            <a:br/>
+            <a:r>
+              <a:t>query_database" → works.</a:t>
+            </a:r>
+            <a:br/>
+            <a:br/>
+            <a:r>
+              <a:t>Iterated multiple times before</a:t>
+            </a:r>
+            <a:br/>
+            <a:r>
+              <a:t>agent routed correctly.</a:t>
+            </a:r>
+          </a:p>
+        </p:txBody>
+      </p:sp>
+      <p:sp>
+        <p:nvSpPr>
+          <p:cNvPr id="7" name="Rounded Rectangle 6"/>
+          <p:cNvSpPr/>
+          <p:nvPr/>
+        </p:nvSpPr>
+        <p:spPr>
+          <a:xfrm>
+            <a:off x="6217920" y="1645920"/>
+            <a:ext cx="5212080" cy="4572000"/>
+          </a:xfrm>
+          <a:prstGeom prst="roundRect">
+            <a:avLst>
+              <a:gd name="adj" fmla="val 5000"/>
+            </a:avLst>
+          </a:prstGeom>
+          <a:solidFill>
+            <a:srgbClr val="F9FAFB"/>
+          </a:solidFill>
+          <a:ln w="19050">
+            <a:solidFill>
+              <a:srgbClr val="FE7624"/>
+            </a:solidFill>
+          </a:ln>
+        </p:spPr>
+        <p:style>
+          <a:lnRef idx="1">
+            <a:schemeClr val="accent1"/>
+          </a:lnRef>
+          <a:fillRef idx="3">
+            <a:schemeClr val="accent1"/>
+          </a:fillRef>
+          <a:effectRef idx="2">
+            <a:schemeClr val="accent1"/>
+          </a:effectRef>
+          <a:fontRef idx="minor">
+            <a:schemeClr val="lt1"/>
+          </a:fontRef>
+        </p:style>
+        <p:txBody>
+          <a:bodyPr rtlCol="0" anchor="ctr"/>
+          <a:lstStyle/>
+          <a:p>
+            <a:pPr algn="ctr"/>
+          </a:p>
+        </p:txBody>
+      </p:sp>
+      <p:sp>
+        <p:nvSpPr>
+          <p:cNvPr id="8" name="Rectangle 7"/>
+          <p:cNvSpPr/>
+          <p:nvPr/>
+        </p:nvSpPr>
+        <p:spPr>
+          <a:xfrm>
+            <a:off x="6217920" y="1645920"/>
+            <a:ext cx="5212080" cy="63500"/>
+          </a:xfrm>
+          <a:prstGeom prst="rect">
+            <a:avLst/>
+          </a:prstGeom>
+          <a:solidFill>
+            <a:srgbClr val="FE7624"/>
+          </a:solidFill>
+          <a:ln>
+            <a:noFill/>
+          </a:ln>
+        </p:spPr>
+        <p:style>
+          <a:lnRef idx="1">
+            <a:schemeClr val="accent1"/>
+          </a:lnRef>
+          <a:fillRef idx="3">
+            <a:schemeClr val="accent1"/>
+          </a:fillRef>
+          <a:effectRef idx="2">
+            <a:schemeClr val="accent1"/>
+          </a:effectRef>
+          <a:fontRef idx="minor">
+            <a:schemeClr val="lt1"/>
+          </a:fontRef>
+        </p:style>
+        <p:txBody>
+          <a:bodyPr rtlCol="0" anchor="ctr"/>
+          <a:lstStyle/>
+          <a:p>
+            <a:pPr algn="ctr"/>
+          </a:p>
+        </p:txBody>
+      </p:sp>
+      <p:sp>
+        <p:nvSpPr>
+          <p:cNvPr id="9" name="TextBox 8"/>
+          <p:cNvSpPr txBox="1"/>
+          <p:nvPr/>
+        </p:nvSpPr>
+        <p:spPr>
+          <a:xfrm>
+            <a:off x="6400800" y="1874520"/>
+            <a:ext cx="4846320" cy="365760"/>
+          </a:xfrm>
+          <a:prstGeom prst="rect">
+            <a:avLst/>
+          </a:prstGeom>
+          <a:noFill/>
+        </p:spPr>
+        <p:txBody>
+          <a:bodyPr wrap="square" anchor="t">
+            <a:spAutoFit/>
+          </a:bodyPr>
+          <a:lstStyle/>
+          <a:p>
+            <a:pPr algn="l">
+              <a:lnSpc>
+                <a:spcPts val="1400"/>
+              </a:lnSpc>
+              <a:defRPr sz="1200" b="1">
+                <a:solidFill>
+                  <a:srgbClr val="1E293B"/>
+                </a:solidFill>
+                <a:latin typeface="Plus Jakarta Sans"/>
+              </a:defRPr>
+            </a:pPr>
+            <a:r>
+              <a:t>What we'd do differently</a:t>
+            </a:r>
+          </a:p>
+        </p:txBody>
+      </p:sp>
+      <p:sp>
+        <p:nvSpPr>
+          <p:cNvPr id="10" name="TextBox 9"/>
+          <p:cNvSpPr txBox="1"/>
+          <p:nvPr/>
+        </p:nvSpPr>
+        <p:spPr>
+          <a:xfrm>
+            <a:off x="6400800" y="2240280"/>
+            <a:ext cx="4846320" cy="3840480"/>
+          </a:xfrm>
+          <a:prstGeom prst="rect">
+            <a:avLst/>
+          </a:prstGeom>
+          <a:noFill/>
+        </p:spPr>
+        <p:txBody>
+          <a:bodyPr wrap="square" anchor="t">
+            <a:spAutoFit/>
+          </a:bodyPr>
+          <a:lstStyle/>
+          <a:p>
+            <a:pPr algn="l">
+              <a:lnSpc>
+                <a:spcPts val="1500"/>
+              </a:lnSpc>
+              <a:defRPr sz="1000" b="0">
+                <a:solidFill>
+                  <a:srgbClr val="4D4E4E"/>
+                </a:solidFill>
+                <a:latin typeface="Plus Jakarta Sans"/>
+              </a:defRPr>
+            </a:pPr>
+            <a:r>
+              <a:t>• Add query rewriting for L4</a:t>
+            </a:r>
+            <a:br/>
+            <a:r>
+              <a:t>  (pronouns → explicit references)</a:t>
+            </a:r>
+            <a:br/>
+            <a:br/>
+            <a:r>
+              <a:t>• Automated testing with</a:t>
+            </a:r>
+            <a:br/>
+            <a:r>
+              <a:t>  question JSON files</a:t>
+            </a:r>
+            <a:br/>
+            <a:br/>
+            <a:r>
+              <a:t>• Fallback error messages when</a:t>
+            </a:r>
+            <a:br/>
+            <a:r>
+              <a:t>  Monitoring API is unreachable</a:t>
+            </a:r>
+          </a:p>
+        </p:txBody>
+      </p:sp>
+    </p:spTree>
+  </p:cSld>
+  <p:clrMapOvr>
+    <a:masterClrMapping/>
+  </p:clrMapOvr>
+</p:sld>
+</file>
+
+<file path=ppt/slides/slide16.xml><?xml version="1.0" encoding="utf-8"?>
 <p:sld xmlns:a="http://schemas.openxmlformats.org/drawingml/2006/main" xmlns:p="http://schemas.openxmlformats.org/presentationml/2006/main" xmlns:r="http://schemas.openxmlformats.org/officeDocument/2006/relationships">
   <p:cSld>
     <p:bg>
@@ -4217,14 +5230,135 @@
       <p:grpSpPr/>
       <p:sp>
         <p:nvSpPr>
-          <p:cNvPr id="2" name="TextBox 1"/>
+          <p:cNvPr id="2" name="Oval 1"/>
+          <p:cNvSpPr/>
+          <p:nvPr/>
+        </p:nvSpPr>
+        <p:spPr>
+          <a:xfrm>
+            <a:off x="8229600" y="3657600"/>
+            <a:ext cx="5486400" cy="5486400"/>
+          </a:xfrm>
+          <a:prstGeom prst="ellipse">
+            <a:avLst/>
+          </a:prstGeom>
+          <a:solidFill>
+            <a:srgbClr val="2D3A55"/>
+          </a:solidFill>
+          <a:ln>
+            <a:noFill/>
+          </a:ln>
+        </p:spPr>
+        <p:style>
+          <a:lnRef idx="1">
+            <a:schemeClr val="accent1"/>
+          </a:lnRef>
+          <a:fillRef idx="3">
+            <a:schemeClr val="accent1"/>
+          </a:fillRef>
+          <a:effectRef idx="2">
+            <a:schemeClr val="accent1"/>
+          </a:effectRef>
+          <a:fontRef idx="minor">
+            <a:schemeClr val="lt1"/>
+          </a:fontRef>
+        </p:style>
+        <p:txBody>
+          <a:bodyPr rtlCol="0" anchor="ctr"/>
+          <a:lstStyle/>
+          <a:p>
+            <a:pPr algn="ctr"/>
+          </a:p>
+        </p:txBody>
+      </p:sp>
+      <p:sp>
+        <p:nvSpPr>
+          <p:cNvPr id="3" name="TextBox 2"/>
           <p:cNvSpPr txBox="1"/>
           <p:nvPr/>
         </p:nvSpPr>
         <p:spPr>
           <a:xfrm>
-            <a:off x="731520" y="2286000"/>
-            <a:ext cx="10058400" cy="914400"/>
+            <a:off x="731520" y="1828800"/>
+            <a:ext cx="10515600" cy="1097280"/>
+          </a:xfrm>
+          <a:prstGeom prst="rect">
+            <a:avLst/>
+          </a:prstGeom>
+          <a:noFill/>
+        </p:spPr>
+        <p:txBody>
+          <a:bodyPr wrap="square" anchor="t">
+            <a:spAutoFit/>
+          </a:bodyPr>
+          <a:lstStyle/>
+          <a:p>
+            <a:pPr algn="ctr">
+              <a:lnSpc>
+                <a:spcPts val="6200"/>
+              </a:lnSpc>
+              <a:defRPr sz="5200" b="1">
+                <a:solidFill>
+                  <a:srgbClr val="FFFFFF"/>
+                </a:solidFill>
+                <a:latin typeface="Plus Jakarta Sans"/>
+              </a:defRPr>
+            </a:pPr>
+            <a:r>
+              <a:t>Thank You!</a:t>
+            </a:r>
+          </a:p>
+        </p:txBody>
+      </p:sp>
+      <p:sp>
+        <p:nvSpPr>
+          <p:cNvPr id="4" name="TextBox 3"/>
+          <p:cNvSpPr txBox="1"/>
+          <p:nvPr/>
+        </p:nvSpPr>
+        <p:spPr>
+          <a:xfrm>
+            <a:off x="731520" y="3200400"/>
+            <a:ext cx="10515600" cy="548640"/>
+          </a:xfrm>
+          <a:prstGeom prst="rect">
+            <a:avLst/>
+          </a:prstGeom>
+          <a:noFill/>
+        </p:spPr>
+        <p:txBody>
+          <a:bodyPr wrap="square" anchor="t">
+            <a:spAutoFit/>
+          </a:bodyPr>
+          <a:lstStyle/>
+          <a:p>
+            <a:pPr algn="ctr">
+              <a:lnSpc>
+                <a:spcPts val="2600"/>
+              </a:lnSpc>
+              <a:defRPr sz="2200" b="0">
+                <a:solidFill>
+                  <a:srgbClr val="FE7624"/>
+                </a:solidFill>
+                <a:latin typeface="Plus Jakarta Sans"/>
+              </a:defRPr>
+            </a:pPr>
+            <a:r>
+              <a:t>Group 9 — GeekBrain AI Assistant</a:t>
+            </a:r>
+          </a:p>
+        </p:txBody>
+      </p:sp>
+      <p:sp>
+        <p:nvSpPr>
+          <p:cNvPr id="5" name="TextBox 4"/>
+          <p:cNvSpPr txBox="1"/>
+          <p:nvPr/>
+        </p:nvSpPr>
+        <p:spPr>
+          <a:xfrm>
+            <a:off x="1828800" y="4114800"/>
+            <a:ext cx="8229600" cy="1371600"/>
           </a:xfrm>
           <a:prstGeom prst="rect">
             <a:avLst/>
@@ -4237,92 +5371,64 @@
           </a:bodyPr>
           <a:lstStyle/>
           <a:p>
-            <a:pPr algn="ctr">
-              <a:defRPr sz="4800" b="1">
-                <a:solidFill>
-                  <a:srgbClr val="FFFFFF"/>
-                </a:solidFill>
-                <a:latin typeface="Calibri"/>
+            <a:pPr>
+              <a:spcBef>
+                <a:spcPts val="400"/>
+              </a:spcBef>
+              <a:defRPr sz="1400">
+                <a:solidFill>
+                  <a:srgbClr val="C4D5DD"/>
+                </a:solidFill>
+                <a:latin typeface="Plus Jakarta Sans"/>
               </a:defRPr>
             </a:pPr>
             <a:r>
-              <a:t>Thank You!</a:t>
-            </a:r>
-          </a:p>
-        </p:txBody>
-      </p:sp>
-      <p:sp>
-        <p:nvSpPr>
-          <p:cNvPr id="3" name="TextBox 2"/>
-          <p:cNvSpPr txBox="1"/>
-          <p:nvPr/>
-        </p:nvSpPr>
-        <p:spPr>
-          <a:xfrm>
-            <a:off x="731520" y="3474720"/>
-            <a:ext cx="10058400" cy="548640"/>
-          </a:xfrm>
-          <a:prstGeom prst="rect">
-            <a:avLst/>
-          </a:prstGeom>
-          <a:noFill/>
-        </p:spPr>
-        <p:txBody>
-          <a:bodyPr wrap="square">
-            <a:spAutoFit/>
-          </a:bodyPr>
-          <a:lstStyle/>
-          <a:p>
-            <a:pPr algn="ctr">
-              <a:defRPr sz="2200" b="0">
-                <a:solidFill>
-                  <a:srgbClr val="FE7624"/>
-                </a:solidFill>
-                <a:latin typeface="Calibri"/>
+              <a:t>Evidence Pack: docs/W4_evidence.md</a:t>
+            </a:r>
+          </a:p>
+          <a:p>
+            <a:pPr>
+              <a:spcBef>
+                <a:spcPts val="400"/>
+              </a:spcBef>
+              <a:defRPr sz="1400">
+                <a:solidFill>
+                  <a:srgbClr val="C4D5DD"/>
+                </a:solidFill>
+                <a:latin typeface="Plus Jakarta Sans"/>
               </a:defRPr>
             </a:pPr>
             <a:r>
-              <a:t>Group 9 — GeekBrain AI Assistant</a:t>
-            </a:r>
-          </a:p>
-        </p:txBody>
-      </p:sp>
-      <p:sp>
-        <p:nvSpPr>
-          <p:cNvPr id="4" name="TextBox 3"/>
-          <p:cNvSpPr txBox="1"/>
-          <p:nvPr/>
-        </p:nvSpPr>
-        <p:spPr>
-          <a:xfrm>
-            <a:off x="731520" y="4389120"/>
-            <a:ext cx="10058400" cy="914400"/>
-          </a:xfrm>
-          <a:prstGeom prst="rect">
-            <a:avLst/>
-          </a:prstGeom>
-          <a:noFill/>
-        </p:spPr>
-        <p:txBody>
-          <a:bodyPr wrap="square">
-            <a:spAutoFit/>
-          </a:bodyPr>
-          <a:lstStyle/>
-          <a:p>
-            <a:pPr algn="ctr">
-              <a:defRPr sz="1600" b="0">
+              <a:t>Repo: github.com/hoang-trong-tan/G9-W4</a:t>
+            </a:r>
+          </a:p>
+          <a:p>
+            <a:pPr>
+              <a:spcBef>
+                <a:spcPts val="400"/>
+              </a:spcBef>
+              <a:defRPr sz="1400">
                 <a:solidFill>
                   <a:srgbClr val="C4D5DD"/>
                 </a:solidFill>
-                <a:latin typeface="Calibri"/>
+                <a:latin typeface="Plus Jakarta Sans"/>
               </a:defRPr>
             </a:pPr>
-            <a:r>
-              <a:t>Evidence Pack: docs/W4_evidence.md</a:t>
-            </a:r>
-            <a:br/>
-            <a:r>
-              <a:t>Repo: github.com/hoang-trong-tan/G9-W4</a:t>
+          </a:p>
+          <a:p>
+            <a:pPr>
+              <a:spcBef>
+                <a:spcPts val="400"/>
+              </a:spcBef>
+              <a:defRPr sz="1400">
+                <a:solidFill>
+                  <a:srgbClr val="C4D5DD"/>
+                </a:solidFill>
+                <a:latin typeface="Plus Jakarta Sans"/>
+              </a:defRPr>
+            </a:pPr>
+            <a:r>
+              <a:t>Questions?</a:t>
             </a:r>
           </a:p>
         </p:txBody>
@@ -4354,7 +5460,7 @@
         <p:spPr>
           <a:xfrm>
             <a:off x="731520" y="457200"/>
-            <a:ext cx="4572000" cy="457200"/>
+            <a:ext cx="3657600" cy="274320"/>
           </a:xfrm>
           <a:prstGeom prst="rect">
             <a:avLst/>
@@ -4362,17 +5468,20 @@
           <a:noFill/>
         </p:spPr>
         <p:txBody>
-          <a:bodyPr wrap="square">
+          <a:bodyPr wrap="square" anchor="t">
             <a:spAutoFit/>
           </a:bodyPr>
           <a:lstStyle/>
           <a:p>
             <a:pPr algn="l">
-              <a:defRPr sz="1400" b="1">
+              <a:lnSpc>
+                <a:spcPts val="1200"/>
+              </a:lnSpc>
+              <a:defRPr sz="1000" b="1">
                 <a:solidFill>
                   <a:srgbClr val="FE7624"/>
                 </a:solidFill>
-                <a:latin typeface="Calibri"/>
+                <a:latin typeface="Plus Jakarta Sans"/>
               </a:defRPr>
             </a:pPr>
             <a:r>
@@ -4389,8 +5498,8 @@
         </p:nvSpPr>
         <p:spPr>
           <a:xfrm>
-            <a:off x="731520" y="914400"/>
-            <a:ext cx="9144000" cy="731520"/>
+            <a:off x="731520" y="822960"/>
+            <a:ext cx="7315200" cy="640080"/>
           </a:xfrm>
           <a:prstGeom prst="rect">
             <a:avLst/>
@@ -4398,35 +5507,128 @@
           <a:noFill/>
         </p:spPr>
         <p:txBody>
-          <a:bodyPr wrap="square">
+          <a:bodyPr wrap="square" anchor="t">
             <a:spAutoFit/>
           </a:bodyPr>
           <a:lstStyle/>
           <a:p>
             <a:pPr algn="l">
-              <a:defRPr sz="3600" b="1">
+              <a:lnSpc>
+                <a:spcPts val="3800"/>
+              </a:lnSpc>
+              <a:defRPr sz="3200" b="1">
                 <a:solidFill>
                   <a:srgbClr val="1E293B"/>
                 </a:solidFill>
-                <a:latin typeface="Calibri"/>
+                <a:latin typeface="Plus Jakarta Sans"/>
               </a:defRPr>
             </a:pPr>
             <a:r>
-              <a:t>What we'll cover today.</a:t>
-            </a:r>
-          </a:p>
-        </p:txBody>
-      </p:sp>
-      <p:sp>
-        <p:nvSpPr>
-          <p:cNvPr id="4" name="TextBox 3"/>
+              <a:t>What we'll cover.</a:t>
+            </a:r>
+          </a:p>
+        </p:txBody>
+      </p:sp>
+      <p:sp>
+        <p:nvSpPr>
+          <p:cNvPr id="4" name="Rounded Rectangle 3"/>
+          <p:cNvSpPr/>
+          <p:nvPr/>
+        </p:nvSpPr>
+        <p:spPr>
+          <a:xfrm>
+            <a:off x="731520" y="1828800"/>
+            <a:ext cx="2651760" cy="1828800"/>
+          </a:xfrm>
+          <a:prstGeom prst="roundRect">
+            <a:avLst>
+              <a:gd name="adj" fmla="val 5000"/>
+            </a:avLst>
+          </a:prstGeom>
+          <a:solidFill>
+            <a:srgbClr val="F9FAFB"/>
+          </a:solidFill>
+          <a:ln w="19050">
+            <a:solidFill>
+              <a:srgbClr val="FE7624"/>
+            </a:solidFill>
+          </a:ln>
+        </p:spPr>
+        <p:style>
+          <a:lnRef idx="1">
+            <a:schemeClr val="accent1"/>
+          </a:lnRef>
+          <a:fillRef idx="3">
+            <a:schemeClr val="accent1"/>
+          </a:fillRef>
+          <a:effectRef idx="2">
+            <a:schemeClr val="accent1"/>
+          </a:effectRef>
+          <a:fontRef idx="minor">
+            <a:schemeClr val="lt1"/>
+          </a:fontRef>
+        </p:style>
+        <p:txBody>
+          <a:bodyPr rtlCol="0" anchor="ctr"/>
+          <a:lstStyle/>
+          <a:p>
+            <a:pPr algn="ctr"/>
+          </a:p>
+        </p:txBody>
+      </p:sp>
+      <p:sp>
+        <p:nvSpPr>
+          <p:cNvPr id="5" name="Rectangle 4"/>
+          <p:cNvSpPr/>
+          <p:nvPr/>
+        </p:nvSpPr>
+        <p:spPr>
+          <a:xfrm>
+            <a:off x="731520" y="1828800"/>
+            <a:ext cx="2651760" cy="63500"/>
+          </a:xfrm>
+          <a:prstGeom prst="rect">
+            <a:avLst/>
+          </a:prstGeom>
+          <a:solidFill>
+            <a:srgbClr val="FE7624"/>
+          </a:solidFill>
+          <a:ln>
+            <a:noFill/>
+          </a:ln>
+        </p:spPr>
+        <p:style>
+          <a:lnRef idx="1">
+            <a:schemeClr val="accent1"/>
+          </a:lnRef>
+          <a:fillRef idx="3">
+            <a:schemeClr val="accent1"/>
+          </a:fillRef>
+          <a:effectRef idx="2">
+            <a:schemeClr val="accent1"/>
+          </a:effectRef>
+          <a:fontRef idx="minor">
+            <a:schemeClr val="lt1"/>
+          </a:fontRef>
+        </p:style>
+        <p:txBody>
+          <a:bodyPr rtlCol="0" anchor="ctr"/>
+          <a:lstStyle/>
+          <a:p>
+            <a:pPr algn="ctr"/>
+          </a:p>
+        </p:txBody>
+      </p:sp>
+      <p:sp>
+        <p:nvSpPr>
+          <p:cNvPr id="6" name="TextBox 5"/>
           <p:cNvSpPr txBox="1"/>
           <p:nvPr/>
         </p:nvSpPr>
         <p:spPr>
           <a:xfrm>
-            <a:off x="1097280" y="2011680"/>
-            <a:ext cx="9144000" cy="4572000"/>
+            <a:off x="914400" y="2057400"/>
+            <a:ext cx="2286000" cy="365760"/>
           </a:xfrm>
           <a:prstGeom prst="rect">
             <a:avLst/>
@@ -4434,175 +5636,583 @@
           <a:noFill/>
         </p:spPr>
         <p:txBody>
-          <a:bodyPr wrap="square">
+          <a:bodyPr wrap="square" anchor="t">
             <a:spAutoFit/>
           </a:bodyPr>
           <a:lstStyle/>
           <a:p>
-            <a:pPr>
-              <a:spcBef>
-                <a:spcPts val="600"/>
-              </a:spcBef>
-              <a:defRPr sz="1800">
+            <a:pPr algn="l">
+              <a:lnSpc>
+                <a:spcPts val="1400"/>
+              </a:lnSpc>
+              <a:defRPr sz="1200" b="1">
+                <a:solidFill>
+                  <a:srgbClr val="1E293B"/>
+                </a:solidFill>
+                <a:latin typeface="Plus Jakarta Sans"/>
+              </a:defRPr>
+            </a:pPr>
+            <a:r>
+              <a:t>01  Architecture</a:t>
+            </a:r>
+          </a:p>
+        </p:txBody>
+      </p:sp>
+      <p:sp>
+        <p:nvSpPr>
+          <p:cNvPr id="7" name="TextBox 6"/>
+          <p:cNvSpPr txBox="1"/>
+          <p:nvPr/>
+        </p:nvSpPr>
+        <p:spPr>
+          <a:xfrm>
+            <a:off x="914400" y="2423160"/>
+            <a:ext cx="2286000" cy="1097280"/>
+          </a:xfrm>
+          <a:prstGeom prst="rect">
+            <a:avLst/>
+          </a:prstGeom>
+          <a:noFill/>
+        </p:spPr>
+        <p:txBody>
+          <a:bodyPr wrap="square" anchor="t">
+            <a:spAutoFit/>
+          </a:bodyPr>
+          <a:lstStyle/>
+          <a:p>
+            <a:pPr algn="l">
+              <a:lnSpc>
+                <a:spcPts val="1500"/>
+              </a:lnSpc>
+              <a:defRPr sz="1000" b="0">
                 <a:solidFill>
                   <a:srgbClr val="4D4E4E"/>
                 </a:solidFill>
-                <a:latin typeface="Calibri"/>
+                <a:latin typeface="Plus Jakarta Sans"/>
               </a:defRPr>
             </a:pPr>
             <a:r>
-              <a:t>1.  Architecture Overview  (3 min)</a:t>
-            </a:r>
-          </a:p>
-          <a:p>
-            <a:pPr>
-              <a:spcBef>
-                <a:spcPts val="600"/>
-              </a:spcBef>
-              <a:defRPr sz="1800">
+              <a:t>System diagram, key decisions,</a:t>
+            </a:r>
+            <a:br/>
+            <a:r>
+              <a:t>data flow through the pipeline.</a:t>
+            </a:r>
+          </a:p>
+        </p:txBody>
+      </p:sp>
+      <p:sp>
+        <p:nvSpPr>
+          <p:cNvPr id="8" name="Rounded Rectangle 7"/>
+          <p:cNvSpPr/>
+          <p:nvPr/>
+        </p:nvSpPr>
+        <p:spPr>
+          <a:xfrm>
+            <a:off x="3566160" y="1828800"/>
+            <a:ext cx="2651760" cy="1828800"/>
+          </a:xfrm>
+          <a:prstGeom prst="roundRect">
+            <a:avLst>
+              <a:gd name="adj" fmla="val 5000"/>
+            </a:avLst>
+          </a:prstGeom>
+          <a:solidFill>
+            <a:srgbClr val="F9FAFB"/>
+          </a:solidFill>
+          <a:ln w="19050">
+            <a:solidFill>
+              <a:srgbClr val="007BC1"/>
+            </a:solidFill>
+          </a:ln>
+        </p:spPr>
+        <p:style>
+          <a:lnRef idx="1">
+            <a:schemeClr val="accent1"/>
+          </a:lnRef>
+          <a:fillRef idx="3">
+            <a:schemeClr val="accent1"/>
+          </a:fillRef>
+          <a:effectRef idx="2">
+            <a:schemeClr val="accent1"/>
+          </a:effectRef>
+          <a:fontRef idx="minor">
+            <a:schemeClr val="lt1"/>
+          </a:fontRef>
+        </p:style>
+        <p:txBody>
+          <a:bodyPr rtlCol="0" anchor="ctr"/>
+          <a:lstStyle/>
+          <a:p>
+            <a:pPr algn="ctr"/>
+          </a:p>
+        </p:txBody>
+      </p:sp>
+      <p:sp>
+        <p:nvSpPr>
+          <p:cNvPr id="9" name="Rectangle 8"/>
+          <p:cNvSpPr/>
+          <p:nvPr/>
+        </p:nvSpPr>
+        <p:spPr>
+          <a:xfrm>
+            <a:off x="3566160" y="1828800"/>
+            <a:ext cx="2651760" cy="63500"/>
+          </a:xfrm>
+          <a:prstGeom prst="rect">
+            <a:avLst/>
+          </a:prstGeom>
+          <a:solidFill>
+            <a:srgbClr val="007BC1"/>
+          </a:solidFill>
+          <a:ln>
+            <a:noFill/>
+          </a:ln>
+        </p:spPr>
+        <p:style>
+          <a:lnRef idx="1">
+            <a:schemeClr val="accent1"/>
+          </a:lnRef>
+          <a:fillRef idx="3">
+            <a:schemeClr val="accent1"/>
+          </a:fillRef>
+          <a:effectRef idx="2">
+            <a:schemeClr val="accent1"/>
+          </a:effectRef>
+          <a:fontRef idx="minor">
+            <a:schemeClr val="lt1"/>
+          </a:fontRef>
+        </p:style>
+        <p:txBody>
+          <a:bodyPr rtlCol="0" anchor="ctr"/>
+          <a:lstStyle/>
+          <a:p>
+            <a:pPr algn="ctr"/>
+          </a:p>
+        </p:txBody>
+      </p:sp>
+      <p:sp>
+        <p:nvSpPr>
+          <p:cNvPr id="10" name="TextBox 9"/>
+          <p:cNvSpPr txBox="1"/>
+          <p:nvPr/>
+        </p:nvSpPr>
+        <p:spPr>
+          <a:xfrm>
+            <a:off x="3749040" y="2057400"/>
+            <a:ext cx="2286000" cy="365760"/>
+          </a:xfrm>
+          <a:prstGeom prst="rect">
+            <a:avLst/>
+          </a:prstGeom>
+          <a:noFill/>
+        </p:spPr>
+        <p:txBody>
+          <a:bodyPr wrap="square" anchor="t">
+            <a:spAutoFit/>
+          </a:bodyPr>
+          <a:lstStyle/>
+          <a:p>
+            <a:pPr algn="l">
+              <a:lnSpc>
+                <a:spcPts val="1400"/>
+              </a:lnSpc>
+              <a:defRPr sz="1200" b="1">
+                <a:solidFill>
+                  <a:srgbClr val="1E293B"/>
+                </a:solidFill>
+                <a:latin typeface="Plus Jakarta Sans"/>
+              </a:defRPr>
+            </a:pPr>
+            <a:r>
+              <a:t>02  Individual Q&amp;A</a:t>
+            </a:r>
+          </a:p>
+        </p:txBody>
+      </p:sp>
+      <p:sp>
+        <p:nvSpPr>
+          <p:cNvPr id="11" name="TextBox 10"/>
+          <p:cNvSpPr txBox="1"/>
+          <p:nvPr/>
+        </p:nvSpPr>
+        <p:spPr>
+          <a:xfrm>
+            <a:off x="3749040" y="2423160"/>
+            <a:ext cx="2286000" cy="1097280"/>
+          </a:xfrm>
+          <a:prstGeom prst="rect">
+            <a:avLst/>
+          </a:prstGeom>
+          <a:noFill/>
+        </p:spPr>
+        <p:txBody>
+          <a:bodyPr wrap="square" anchor="t">
+            <a:spAutoFit/>
+          </a:bodyPr>
+          <a:lstStyle/>
+          <a:p>
+            <a:pPr algn="l">
+              <a:lnSpc>
+                <a:spcPts val="1500"/>
+              </a:lnSpc>
+              <a:defRPr sz="1000" b="0">
                 <a:solidFill>
                   <a:srgbClr val="4D4E4E"/>
                 </a:solidFill>
-                <a:latin typeface="Calibri"/>
+                <a:latin typeface="Plus Jakarta Sans"/>
               </a:defRPr>
             </a:pPr>
             <a:r>
-              <a:t>     System diagram  •  Key decisions  •  Data flow</a:t>
-            </a:r>
-          </a:p>
-          <a:p>
-            <a:pPr>
-              <a:spcBef>
-                <a:spcPts val="600"/>
-              </a:spcBef>
-              <a:defRPr sz="1800">
+              <a:t>Random members explain how</a:t>
+            </a:r>
+            <a:br/>
+            <a:r>
+              <a:t>the system works internally.</a:t>
+            </a:r>
+          </a:p>
+        </p:txBody>
+      </p:sp>
+      <p:sp>
+        <p:nvSpPr>
+          <p:cNvPr id="12" name="Rounded Rectangle 11"/>
+          <p:cNvSpPr/>
+          <p:nvPr/>
+        </p:nvSpPr>
+        <p:spPr>
+          <a:xfrm>
+            <a:off x="6400800" y="1828800"/>
+            <a:ext cx="2651760" cy="1828800"/>
+          </a:xfrm>
+          <a:prstGeom prst="roundRect">
+            <a:avLst>
+              <a:gd name="adj" fmla="val 5000"/>
+            </a:avLst>
+          </a:prstGeom>
+          <a:solidFill>
+            <a:srgbClr val="F9FAFB"/>
+          </a:solidFill>
+          <a:ln w="19050">
+            <a:solidFill>
+              <a:srgbClr val="00AC4E"/>
+            </a:solidFill>
+          </a:ln>
+        </p:spPr>
+        <p:style>
+          <a:lnRef idx="1">
+            <a:schemeClr val="accent1"/>
+          </a:lnRef>
+          <a:fillRef idx="3">
+            <a:schemeClr val="accent1"/>
+          </a:fillRef>
+          <a:effectRef idx="2">
+            <a:schemeClr val="accent1"/>
+          </a:effectRef>
+          <a:fontRef idx="minor">
+            <a:schemeClr val="lt1"/>
+          </a:fontRef>
+        </p:style>
+        <p:txBody>
+          <a:bodyPr rtlCol="0" anchor="ctr"/>
+          <a:lstStyle/>
+          <a:p>
+            <a:pPr algn="ctr"/>
+          </a:p>
+        </p:txBody>
+      </p:sp>
+      <p:sp>
+        <p:nvSpPr>
+          <p:cNvPr id="13" name="Rectangle 12"/>
+          <p:cNvSpPr/>
+          <p:nvPr/>
+        </p:nvSpPr>
+        <p:spPr>
+          <a:xfrm>
+            <a:off x="6400800" y="1828800"/>
+            <a:ext cx="2651760" cy="63500"/>
+          </a:xfrm>
+          <a:prstGeom prst="rect">
+            <a:avLst/>
+          </a:prstGeom>
+          <a:solidFill>
+            <a:srgbClr val="00AC4E"/>
+          </a:solidFill>
+          <a:ln>
+            <a:noFill/>
+          </a:ln>
+        </p:spPr>
+        <p:style>
+          <a:lnRef idx="1">
+            <a:schemeClr val="accent1"/>
+          </a:lnRef>
+          <a:fillRef idx="3">
+            <a:schemeClr val="accent1"/>
+          </a:fillRef>
+          <a:effectRef idx="2">
+            <a:schemeClr val="accent1"/>
+          </a:effectRef>
+          <a:fontRef idx="minor">
+            <a:schemeClr val="lt1"/>
+          </a:fontRef>
+        </p:style>
+        <p:txBody>
+          <a:bodyPr rtlCol="0" anchor="ctr"/>
+          <a:lstStyle/>
+          <a:p>
+            <a:pPr algn="ctr"/>
+          </a:p>
+        </p:txBody>
+      </p:sp>
+      <p:sp>
+        <p:nvSpPr>
+          <p:cNvPr id="14" name="TextBox 13"/>
+          <p:cNvSpPr txBox="1"/>
+          <p:nvPr/>
+        </p:nvSpPr>
+        <p:spPr>
+          <a:xfrm>
+            <a:off x="6583680" y="2057400"/>
+            <a:ext cx="2286000" cy="365760"/>
+          </a:xfrm>
+          <a:prstGeom prst="rect">
+            <a:avLst/>
+          </a:prstGeom>
+          <a:noFill/>
+        </p:spPr>
+        <p:txBody>
+          <a:bodyPr wrap="square" anchor="t">
+            <a:spAutoFit/>
+          </a:bodyPr>
+          <a:lstStyle/>
+          <a:p>
+            <a:pPr algn="l">
+              <a:lnSpc>
+                <a:spcPts val="1400"/>
+              </a:lnSpc>
+              <a:defRPr sz="1200" b="1">
+                <a:solidFill>
+                  <a:srgbClr val="1E293B"/>
+                </a:solidFill>
+                <a:latin typeface="Plus Jakarta Sans"/>
+              </a:defRPr>
+            </a:pPr>
+            <a:r>
+              <a:t>03  Live Demo</a:t>
+            </a:r>
+          </a:p>
+        </p:txBody>
+      </p:sp>
+      <p:sp>
+        <p:nvSpPr>
+          <p:cNvPr id="15" name="TextBox 14"/>
+          <p:cNvSpPr txBox="1"/>
+          <p:nvPr/>
+        </p:nvSpPr>
+        <p:spPr>
+          <a:xfrm>
+            <a:off x="6583680" y="2423160"/>
+            <a:ext cx="2286000" cy="1097280"/>
+          </a:xfrm>
+          <a:prstGeom prst="rect">
+            <a:avLst/>
+          </a:prstGeom>
+          <a:noFill/>
+        </p:spPr>
+        <p:txBody>
+          <a:bodyPr wrap="square" anchor="t">
+            <a:spAutoFit/>
+          </a:bodyPr>
+          <a:lstStyle/>
+          <a:p>
+            <a:pPr algn="l">
+              <a:lnSpc>
+                <a:spcPts val="1500"/>
+              </a:lnSpc>
+              <a:defRPr sz="1000" b="0">
                 <a:solidFill>
                   <a:srgbClr val="4D4E4E"/>
                 </a:solidFill>
-                <a:latin typeface="Calibri"/>
+                <a:latin typeface="Plus Jakarta Sans"/>
               </a:defRPr>
             </a:pPr>
-          </a:p>
-          <a:p>
-            <a:pPr>
-              <a:spcBef>
-                <a:spcPts val="600"/>
-              </a:spcBef>
-              <a:defRPr sz="1800">
+            <a:r>
+              <a:t>L1 → L2 → L3 → L4</a:t>
+            </a:r>
+            <a:br/>
+            <a:r>
+              <a:t>progressive demonstration.</a:t>
+            </a:r>
+          </a:p>
+        </p:txBody>
+      </p:sp>
+      <p:sp>
+        <p:nvSpPr>
+          <p:cNvPr id="16" name="Rounded Rectangle 15"/>
+          <p:cNvSpPr/>
+          <p:nvPr/>
+        </p:nvSpPr>
+        <p:spPr>
+          <a:xfrm>
+            <a:off x="9235440" y="1828800"/>
+            <a:ext cx="2651760" cy="1828800"/>
+          </a:xfrm>
+          <a:prstGeom prst="roundRect">
+            <a:avLst>
+              <a:gd name="adj" fmla="val 5000"/>
+            </a:avLst>
+          </a:prstGeom>
+          <a:solidFill>
+            <a:srgbClr val="F9FAFB"/>
+          </a:solidFill>
+          <a:ln w="19050">
+            <a:solidFill>
+              <a:srgbClr val="85439A"/>
+            </a:solidFill>
+          </a:ln>
+        </p:spPr>
+        <p:style>
+          <a:lnRef idx="1">
+            <a:schemeClr val="accent1"/>
+          </a:lnRef>
+          <a:fillRef idx="3">
+            <a:schemeClr val="accent1"/>
+          </a:fillRef>
+          <a:effectRef idx="2">
+            <a:schemeClr val="accent1"/>
+          </a:effectRef>
+          <a:fontRef idx="minor">
+            <a:schemeClr val="lt1"/>
+          </a:fontRef>
+        </p:style>
+        <p:txBody>
+          <a:bodyPr rtlCol="0" anchor="ctr"/>
+          <a:lstStyle/>
+          <a:p>
+            <a:pPr algn="ctr"/>
+          </a:p>
+        </p:txBody>
+      </p:sp>
+      <p:sp>
+        <p:nvSpPr>
+          <p:cNvPr id="17" name="Rectangle 16"/>
+          <p:cNvSpPr/>
+          <p:nvPr/>
+        </p:nvSpPr>
+        <p:spPr>
+          <a:xfrm>
+            <a:off x="9235440" y="1828800"/>
+            <a:ext cx="2651760" cy="63500"/>
+          </a:xfrm>
+          <a:prstGeom prst="rect">
+            <a:avLst/>
+          </a:prstGeom>
+          <a:solidFill>
+            <a:srgbClr val="85439A"/>
+          </a:solidFill>
+          <a:ln>
+            <a:noFill/>
+          </a:ln>
+        </p:spPr>
+        <p:style>
+          <a:lnRef idx="1">
+            <a:schemeClr val="accent1"/>
+          </a:lnRef>
+          <a:fillRef idx="3">
+            <a:schemeClr val="accent1"/>
+          </a:fillRef>
+          <a:effectRef idx="2">
+            <a:schemeClr val="accent1"/>
+          </a:effectRef>
+          <a:fontRef idx="minor">
+            <a:schemeClr val="lt1"/>
+          </a:fontRef>
+        </p:style>
+        <p:txBody>
+          <a:bodyPr rtlCol="0" anchor="ctr"/>
+          <a:lstStyle/>
+          <a:p>
+            <a:pPr algn="ctr"/>
+          </a:p>
+        </p:txBody>
+      </p:sp>
+      <p:sp>
+        <p:nvSpPr>
+          <p:cNvPr id="18" name="TextBox 17"/>
+          <p:cNvSpPr txBox="1"/>
+          <p:nvPr/>
+        </p:nvSpPr>
+        <p:spPr>
+          <a:xfrm>
+            <a:off x="9418320" y="2057400"/>
+            <a:ext cx="2286000" cy="365760"/>
+          </a:xfrm>
+          <a:prstGeom prst="rect">
+            <a:avLst/>
+          </a:prstGeom>
+          <a:noFill/>
+        </p:spPr>
+        <p:txBody>
+          <a:bodyPr wrap="square" anchor="t">
+            <a:spAutoFit/>
+          </a:bodyPr>
+          <a:lstStyle/>
+          <a:p>
+            <a:pPr algn="l">
+              <a:lnSpc>
+                <a:spcPts val="1400"/>
+              </a:lnSpc>
+              <a:defRPr sz="1200" b="1">
+                <a:solidFill>
+                  <a:srgbClr val="1E293B"/>
+                </a:solidFill>
+                <a:latin typeface="Plus Jakarta Sans"/>
+              </a:defRPr>
+            </a:pPr>
+            <a:r>
+              <a:t>04  Lessons Learned</a:t>
+            </a:r>
+          </a:p>
+        </p:txBody>
+      </p:sp>
+      <p:sp>
+        <p:nvSpPr>
+          <p:cNvPr id="19" name="TextBox 18"/>
+          <p:cNvSpPr txBox="1"/>
+          <p:nvPr/>
+        </p:nvSpPr>
+        <p:spPr>
+          <a:xfrm>
+            <a:off x="9418320" y="2423160"/>
+            <a:ext cx="2286000" cy="1097280"/>
+          </a:xfrm>
+          <a:prstGeom prst="rect">
+            <a:avLst/>
+          </a:prstGeom>
+          <a:noFill/>
+        </p:spPr>
+        <p:txBody>
+          <a:bodyPr wrap="square" anchor="t">
+            <a:spAutoFit/>
+          </a:bodyPr>
+          <a:lstStyle/>
+          <a:p>
+            <a:pPr algn="l">
+              <a:lnSpc>
+                <a:spcPts val="1500"/>
+              </a:lnSpc>
+              <a:defRPr sz="1000" b="0">
                 <a:solidFill>
                   <a:srgbClr val="4D4E4E"/>
                 </a:solidFill>
-                <a:latin typeface="Calibri"/>
+                <a:latin typeface="Plus Jakarta Sans"/>
               </a:defRPr>
             </a:pPr>
             <a:r>
-              <a:t>2.  Individual Q&amp;A  (3 min)</a:t>
-            </a:r>
-          </a:p>
-          <a:p>
-            <a:pPr>
-              <a:spcBef>
-                <a:spcPts val="600"/>
-              </a:spcBef>
-              <a:defRPr sz="1800">
-                <a:solidFill>
-                  <a:srgbClr val="4D4E4E"/>
-                </a:solidFill>
-                <a:latin typeface="Calibri"/>
-              </a:defRPr>
-            </a:pPr>
-            <a:r>
-              <a:t>     Random members explain system internals</a:t>
-            </a:r>
-          </a:p>
-          <a:p>
-            <a:pPr>
-              <a:spcBef>
-                <a:spcPts val="600"/>
-              </a:spcBef>
-              <a:defRPr sz="1800">
-                <a:solidFill>
-                  <a:srgbClr val="4D4E4E"/>
-                </a:solidFill>
-                <a:latin typeface="Calibri"/>
-              </a:defRPr>
-            </a:pPr>
-          </a:p>
-          <a:p>
-            <a:pPr>
-              <a:spcBef>
-                <a:spcPts val="600"/>
-              </a:spcBef>
-              <a:defRPr sz="1800">
-                <a:solidFill>
-                  <a:srgbClr val="4D4E4E"/>
-                </a:solidFill>
-                <a:latin typeface="Calibri"/>
-              </a:defRPr>
-            </a:pPr>
-            <a:r>
-              <a:t>3.  Live Demo  (4-5 min)</a:t>
-            </a:r>
-          </a:p>
-          <a:p>
-            <a:pPr>
-              <a:spcBef>
-                <a:spcPts val="600"/>
-              </a:spcBef>
-              <a:defRPr sz="1800">
-                <a:solidFill>
-                  <a:srgbClr val="4D4E4E"/>
-                </a:solidFill>
-                <a:latin typeface="Calibri"/>
-              </a:defRPr>
-            </a:pPr>
-            <a:r>
-              <a:t>     L1 → L2 → L3 → L4 progressive demonstration</a:t>
-            </a:r>
-          </a:p>
-          <a:p>
-            <a:pPr>
-              <a:spcBef>
-                <a:spcPts val="600"/>
-              </a:spcBef>
-              <a:defRPr sz="1800">
-                <a:solidFill>
-                  <a:srgbClr val="4D4E4E"/>
-                </a:solidFill>
-                <a:latin typeface="Calibri"/>
-              </a:defRPr>
-            </a:pPr>
-          </a:p>
-          <a:p>
-            <a:pPr>
-              <a:spcBef>
-                <a:spcPts val="600"/>
-              </a:spcBef>
-              <a:defRPr sz="1800">
-                <a:solidFill>
-                  <a:srgbClr val="4D4E4E"/>
-                </a:solidFill>
-                <a:latin typeface="Calibri"/>
-              </a:defRPr>
-            </a:pPr>
-            <a:r>
-              <a:t>4.  Lessons Learned  (1 min)</a:t>
-            </a:r>
-          </a:p>
-          <a:p>
-            <a:pPr>
-              <a:spcBef>
-                <a:spcPts val="600"/>
-              </a:spcBef>
-              <a:defRPr sz="1800">
-                <a:solidFill>
-                  <a:srgbClr val="4D4E4E"/>
-                </a:solidFill>
-                <a:latin typeface="Calibri"/>
-              </a:defRPr>
-            </a:pPr>
-            <a:r>
-              <a:t>     Hardest level  •  What we'd change</a:t>
+              <a:t>Hardest level and what</a:t>
+            </a:r>
+            <a:br/>
+            <a:r>
+              <a:t>we would change.</a:t>
             </a:r>
           </a:p>
         </p:txBody>
@@ -4618,6 +6228,14 @@
 <file path=ppt/slides/slide3.xml><?xml version="1.0" encoding="utf-8"?>
 <p:sld xmlns:a="http://schemas.openxmlformats.org/drawingml/2006/main" xmlns:p="http://schemas.openxmlformats.org/presentationml/2006/main" xmlns:r="http://schemas.openxmlformats.org/officeDocument/2006/relationships">
   <p:cSld>
+    <p:bg>
+      <p:bgPr>
+        <a:solidFill>
+          <a:srgbClr val="1E293B"/>
+        </a:solidFill>
+        <a:effectLst/>
+      </p:bgPr>
+    </p:bg>
     <p:spTree>
       <p:nvGrpSpPr>
         <p:cNvPr id="1" name=""/>
@@ -4633,8 +6251,8 @@
         </p:nvSpPr>
         <p:spPr>
           <a:xfrm>
-            <a:off x="731520" y="274320"/>
-            <a:ext cx="4572000" cy="365760"/>
+            <a:off x="731520" y="914400"/>
+            <a:ext cx="4572000" cy="2743200"/>
           </a:xfrm>
           <a:prstGeom prst="rect">
             <a:avLst/>
@@ -4642,21 +6260,24 @@
           <a:noFill/>
         </p:spPr>
         <p:txBody>
-          <a:bodyPr wrap="square">
+          <a:bodyPr wrap="square" anchor="t">
             <a:spAutoFit/>
           </a:bodyPr>
           <a:lstStyle/>
           <a:p>
             <a:pPr algn="l">
-              <a:defRPr sz="1200" b="1">
-                <a:solidFill>
-                  <a:srgbClr val="FE7624"/>
-                </a:solidFill>
-                <a:latin typeface="Calibri"/>
+              <a:lnSpc>
+                <a:spcPts val="14400"/>
+              </a:lnSpc>
+              <a:defRPr sz="12000" b="1">
+                <a:solidFill>
+                  <a:srgbClr val="2D3A55"/>
+                </a:solidFill>
+                <a:latin typeface="Plus Jakarta Sans"/>
               </a:defRPr>
             </a:pPr>
             <a:r>
-              <a:t>01 • ARCHITECTURE</a:t>
+              <a:t>01</a:t>
             </a:r>
           </a:p>
         </p:txBody>
@@ -4669,8 +6290,8 @@
         </p:nvSpPr>
         <p:spPr>
           <a:xfrm>
-            <a:off x="731520" y="640080"/>
-            <a:ext cx="9144000" cy="548640"/>
+            <a:off x="731520" y="914400"/>
+            <a:ext cx="3657600" cy="274320"/>
           </a:xfrm>
           <a:prstGeom prst="rect">
             <a:avLst/>
@@ -4678,49 +6299,110 @@
           <a:noFill/>
         </p:spPr>
         <p:txBody>
-          <a:bodyPr wrap="square">
+          <a:bodyPr wrap="square" anchor="t">
             <a:spAutoFit/>
           </a:bodyPr>
           <a:lstStyle/>
           <a:p>
             <a:pPr algn="l">
-              <a:defRPr sz="3000" b="1">
-                <a:solidFill>
-                  <a:srgbClr val="1E293B"/>
-                </a:solidFill>
-                <a:latin typeface="Calibri"/>
+              <a:lnSpc>
+                <a:spcPts val="1200"/>
+              </a:lnSpc>
+              <a:defRPr sz="1000" b="1">
+                <a:solidFill>
+                  <a:srgbClr val="FBAE42"/>
+                </a:solidFill>
+                <a:latin typeface="Plus Jakarta Sans"/>
               </a:defRPr>
             </a:pPr>
             <a:r>
-              <a:t>System Architecture</a:t>
-            </a:r>
-          </a:p>
-        </p:txBody>
-      </p:sp>
-      <p:pic>
-        <p:nvPicPr>
-          <p:cNvPr id="4" name="Picture 3" descr="w4_architecture.png"/>
-          <p:cNvPicPr>
-            <a:picLocks noChangeAspect="1"/>
-          </p:cNvPicPr>
-          <p:nvPr/>
-        </p:nvPicPr>
-        <p:blipFill>
-          <a:blip r:embed="rId2"/>
-          <a:stretch>
-            <a:fillRect/>
-          </a:stretch>
-        </p:blipFill>
-        <p:spPr>
-          <a:xfrm>
-            <a:off x="457200" y="1371600"/>
-            <a:ext cx="11247120" cy="5721727"/>
-          </a:xfrm>
-          <a:prstGeom prst="rect">
-            <a:avLst/>
-          </a:prstGeom>
-        </p:spPr>
-      </p:pic>
+              <a:t>PART 01</a:t>
+            </a:r>
+          </a:p>
+        </p:txBody>
+      </p:sp>
+      <p:sp>
+        <p:nvSpPr>
+          <p:cNvPr id="4" name="TextBox 3"/>
+          <p:cNvSpPr txBox="1"/>
+          <p:nvPr/>
+        </p:nvSpPr>
+        <p:spPr>
+          <a:xfrm>
+            <a:off x="731520" y="3200400"/>
+            <a:ext cx="9144000" cy="1097280"/>
+          </a:xfrm>
+          <a:prstGeom prst="rect">
+            <a:avLst/>
+          </a:prstGeom>
+          <a:noFill/>
+        </p:spPr>
+        <p:txBody>
+          <a:bodyPr wrap="square" anchor="t">
+            <a:spAutoFit/>
+          </a:bodyPr>
+          <a:lstStyle/>
+          <a:p>
+            <a:pPr algn="l">
+              <a:lnSpc>
+                <a:spcPts val="4800"/>
+              </a:lnSpc>
+              <a:defRPr sz="4000" b="1">
+                <a:solidFill>
+                  <a:srgbClr val="FFFFFF"/>
+                </a:solidFill>
+                <a:latin typeface="Plus Jakarta Sans"/>
+              </a:defRPr>
+            </a:pPr>
+            <a:r>
+              <a:t>System Architecture.</a:t>
+            </a:r>
+          </a:p>
+        </p:txBody>
+      </p:sp>
+      <p:sp>
+        <p:nvSpPr>
+          <p:cNvPr id="5" name="TextBox 4"/>
+          <p:cNvSpPr txBox="1"/>
+          <p:nvPr/>
+        </p:nvSpPr>
+        <p:spPr>
+          <a:xfrm>
+            <a:off x="731520" y="4572000"/>
+            <a:ext cx="7315200" cy="731520"/>
+          </a:xfrm>
+          <a:prstGeom prst="rect">
+            <a:avLst/>
+          </a:prstGeom>
+          <a:noFill/>
+        </p:spPr>
+        <p:txBody>
+          <a:bodyPr wrap="square" anchor="t">
+            <a:spAutoFit/>
+          </a:bodyPr>
+          <a:lstStyle/>
+          <a:p>
+            <a:pPr algn="l">
+              <a:lnSpc>
+                <a:spcPts val="1900"/>
+              </a:lnSpc>
+              <a:defRPr sz="1600" b="0">
+                <a:solidFill>
+                  <a:srgbClr val="C4D5DD"/>
+                </a:solidFill>
+                <a:latin typeface="Plus Jakarta Sans"/>
+              </a:defRPr>
+            </a:pPr>
+            <a:r>
+              <a:t>How requests flow through Bedrock Agent, Knowledge Base, and Tools</a:t>
+            </a:r>
+            <a:br/>
+            <a:r>
+              <a:t>— all on AWS with no NAT Gateway.</a:t>
+            </a:r>
+          </a:p>
+        </p:txBody>
+      </p:sp>
     </p:spTree>
   </p:cSld>
   <p:clrMapOvr>
@@ -4747,8 +6429,8 @@
         </p:nvSpPr>
         <p:spPr>
           <a:xfrm>
-            <a:off x="731520" y="274320"/>
-            <a:ext cx="4572000" cy="365760"/>
+            <a:off x="731520" y="365760"/>
+            <a:ext cx="3657600" cy="274320"/>
           </a:xfrm>
           <a:prstGeom prst="rect">
             <a:avLst/>
@@ -4756,21 +6438,24 @@
           <a:noFill/>
         </p:spPr>
         <p:txBody>
-          <a:bodyPr wrap="square">
+          <a:bodyPr wrap="square" anchor="t">
             <a:spAutoFit/>
           </a:bodyPr>
           <a:lstStyle/>
           <a:p>
             <a:pPr algn="l">
-              <a:defRPr sz="1200" b="1">
+              <a:lnSpc>
+                <a:spcPts val="1200"/>
+              </a:lnSpc>
+              <a:defRPr sz="1000" b="1">
                 <a:solidFill>
                   <a:srgbClr val="FE7624"/>
                 </a:solidFill>
-                <a:latin typeface="Calibri"/>
+                <a:latin typeface="Plus Jakarta Sans"/>
               </a:defRPr>
             </a:pPr>
             <a:r>
-              <a:t>01 • DECISIONS</a:t>
+              <a:t>01 • ARCHITECTURE</a:t>
             </a:r>
           </a:p>
         </p:txBody>
@@ -4783,8 +6468,8 @@
         </p:nvSpPr>
         <p:spPr>
           <a:xfrm>
-            <a:off x="731520" y="640080"/>
-            <a:ext cx="9144000" cy="548640"/>
+            <a:off x="731520" y="731520"/>
+            <a:ext cx="7315200" cy="548640"/>
           </a:xfrm>
           <a:prstGeom prst="rect">
             <a:avLst/>
@@ -4792,313 +6477,52 @@
           <a:noFill/>
         </p:spPr>
         <p:txBody>
-          <a:bodyPr wrap="square">
+          <a:bodyPr wrap="square" anchor="t">
             <a:spAutoFit/>
           </a:bodyPr>
           <a:lstStyle/>
           <a:p>
             <a:pPr algn="l">
-              <a:defRPr sz="3000" b="1">
+              <a:lnSpc>
+                <a:spcPts val="3300"/>
+              </a:lnSpc>
+              <a:defRPr sz="2800" b="1">
                 <a:solidFill>
                   <a:srgbClr val="1E293B"/>
                 </a:solidFill>
-                <a:latin typeface="Calibri"/>
+                <a:latin typeface="Plus Jakarta Sans"/>
               </a:defRPr>
             </a:pPr>
             <a:r>
-              <a:t>Key Technical Decisions</a:t>
-            </a:r>
-          </a:p>
-        </p:txBody>
-      </p:sp>
-      <p:sp>
-        <p:nvSpPr>
-          <p:cNvPr id="4" name="TextBox 3"/>
-          <p:cNvSpPr txBox="1"/>
-          <p:nvPr/>
-        </p:nvSpPr>
-        <p:spPr>
-          <a:xfrm>
-            <a:off x="914400" y="1463040"/>
-            <a:ext cx="10058400" cy="365760"/>
-          </a:xfrm>
-          <a:prstGeom prst="rect">
-            <a:avLst/>
-          </a:prstGeom>
-          <a:noFill/>
-        </p:spPr>
-        <p:txBody>
-          <a:bodyPr wrap="square">
-            <a:spAutoFit/>
-          </a:bodyPr>
-          <a:lstStyle/>
-          <a:p>
-            <a:pPr algn="l">
-              <a:defRPr sz="1600" b="1">
-                <a:solidFill>
-                  <a:srgbClr val="1E293B"/>
-                </a:solidFill>
-                <a:latin typeface="Calibri"/>
-              </a:defRPr>
-            </a:pPr>
-            <a:r>
-              <a:t>▸ Bedrock Agents vs Custom Pipeline</a:t>
-            </a:r>
-          </a:p>
-        </p:txBody>
-      </p:sp>
-      <p:sp>
-        <p:nvSpPr>
-          <p:cNvPr id="5" name="TextBox 4"/>
-          <p:cNvSpPr txBox="1"/>
-          <p:nvPr/>
-        </p:nvSpPr>
-        <p:spPr>
-          <a:xfrm>
-            <a:off x="1188720" y="1874520"/>
-            <a:ext cx="9601200" cy="640080"/>
-          </a:xfrm>
-          <a:prstGeom prst="rect">
-            <a:avLst/>
-          </a:prstGeom>
-          <a:noFill/>
-        </p:spPr>
-        <p:txBody>
-          <a:bodyPr wrap="square">
-            <a:spAutoFit/>
-          </a:bodyPr>
-          <a:lstStyle/>
-          <a:p>
-            <a:pPr algn="l">
-              <a:defRPr sz="1400" b="0">
-                <a:solidFill>
-                  <a:srgbClr val="4D4E4E"/>
-                </a:solidFill>
-                <a:latin typeface="Calibri"/>
-              </a:defRPr>
-            </a:pPr>
-            <a:r>
-              <a:t>Chose managed orchestration — Agent handles KB retrieval + tool routing automatically. Trade-off: less control, faster to production.</a:t>
-            </a:r>
-          </a:p>
-        </p:txBody>
-      </p:sp>
-      <p:sp>
-        <p:nvSpPr>
-          <p:cNvPr id="6" name="TextBox 5"/>
-          <p:cNvSpPr txBox="1"/>
-          <p:nvPr/>
-        </p:nvSpPr>
-        <p:spPr>
-          <a:xfrm>
-            <a:off x="914400" y="2560320"/>
-            <a:ext cx="10058400" cy="365760"/>
-          </a:xfrm>
-          <a:prstGeom prst="rect">
-            <a:avLst/>
-          </a:prstGeom>
-          <a:noFill/>
-        </p:spPr>
-        <p:txBody>
-          <a:bodyPr wrap="square">
-            <a:spAutoFit/>
-          </a:bodyPr>
-          <a:lstStyle/>
-          <a:p>
-            <a:pPr algn="l">
-              <a:defRPr sz="1600" b="1">
-                <a:solidFill>
-                  <a:srgbClr val="1E293B"/>
-                </a:solidFill>
-                <a:latin typeface="Calibri"/>
-              </a:defRPr>
-            </a:pPr>
-            <a:r>
-              <a:t>▸ VPC Interface Endpoint vs NAT Gateway</a:t>
-            </a:r>
-          </a:p>
-        </p:txBody>
-      </p:sp>
-      <p:sp>
-        <p:nvSpPr>
-          <p:cNvPr id="7" name="TextBox 6"/>
-          <p:cNvSpPr txBox="1"/>
-          <p:nvPr/>
-        </p:nvSpPr>
-        <p:spPr>
-          <a:xfrm>
-            <a:off x="1188720" y="2971800"/>
-            <a:ext cx="9601200" cy="640080"/>
-          </a:xfrm>
-          <a:prstGeom prst="rect">
-            <a:avLst/>
-          </a:prstGeom>
-          <a:noFill/>
-        </p:spPr>
-        <p:txBody>
-          <a:bodyPr wrap="square">
-            <a:spAutoFit/>
-          </a:bodyPr>
-          <a:lstStyle/>
-          <a:p>
-            <a:pPr algn="l">
-              <a:defRPr sz="1400" b="0">
-                <a:solidFill>
-                  <a:srgbClr val="4D4E4E"/>
-                </a:solidFill>
-                <a:latin typeface="Calibri"/>
-              </a:defRPr>
-            </a:pPr>
-            <a:r>
-              <a:t>Chose VPC Endpoint for API Gateway. Keeps traffic on AWS backbone, saves ~$32/month NAT cost, reduces latency.</a:t>
-            </a:r>
-          </a:p>
-        </p:txBody>
-      </p:sp>
-      <p:sp>
-        <p:nvSpPr>
-          <p:cNvPr id="8" name="TextBox 7"/>
-          <p:cNvSpPr txBox="1"/>
-          <p:nvPr/>
-        </p:nvSpPr>
-        <p:spPr>
-          <a:xfrm>
-            <a:off x="914400" y="3657600"/>
-            <a:ext cx="10058400" cy="365760"/>
-          </a:xfrm>
-          <a:prstGeom prst="rect">
-            <a:avLst/>
-          </a:prstGeom>
-          <a:noFill/>
-        </p:spPr>
-        <p:txBody>
-          <a:bodyPr wrap="square">
-            <a:spAutoFit/>
-          </a:bodyPr>
-          <a:lstStyle/>
-          <a:p>
-            <a:pPr algn="l">
-              <a:defRPr sz="1600" b="1">
-                <a:solidFill>
-                  <a:srgbClr val="1E293B"/>
-                </a:solidFill>
-                <a:latin typeface="Calibri"/>
-              </a:defRPr>
-            </a:pPr>
-            <a:r>
-              <a:t>▸ Lambda Chat Outside VPC</a:t>
-            </a:r>
-          </a:p>
-        </p:txBody>
-      </p:sp>
-      <p:sp>
-        <p:nvSpPr>
-          <p:cNvPr id="9" name="TextBox 8"/>
-          <p:cNvSpPr txBox="1"/>
-          <p:nvPr/>
-        </p:nvSpPr>
-        <p:spPr>
-          <a:xfrm>
-            <a:off x="1188720" y="4069080"/>
-            <a:ext cx="9601200" cy="640080"/>
-          </a:xfrm>
-          <a:prstGeom prst="rect">
-            <a:avLst/>
-          </a:prstGeom>
-          <a:noFill/>
-        </p:spPr>
-        <p:txBody>
-          <a:bodyPr wrap="square">
-            <a:spAutoFit/>
-          </a:bodyPr>
-          <a:lstStyle/>
-          <a:p>
-            <a:pPr algn="l">
-              <a:defRPr sz="1400" b="0">
-                <a:solidFill>
-                  <a:srgbClr val="4D4E4E"/>
-                </a:solidFill>
-                <a:latin typeface="Calibri"/>
-              </a:defRPr>
-            </a:pPr>
-            <a:r>
-              <a:t>No vpc_config — calls Bedrock directly via AWS internal network. Avoids cold start ENI delays (5-10s).</a:t>
-            </a:r>
-          </a:p>
-        </p:txBody>
-      </p:sp>
-      <p:sp>
-        <p:nvSpPr>
-          <p:cNvPr id="10" name="TextBox 9"/>
-          <p:cNvSpPr txBox="1"/>
-          <p:nvPr/>
-        </p:nvSpPr>
-        <p:spPr>
-          <a:xfrm>
-            <a:off x="914400" y="4754880"/>
-            <a:ext cx="10058400" cy="365760"/>
-          </a:xfrm>
-          <a:prstGeom prst="rect">
-            <a:avLst/>
-          </a:prstGeom>
-          <a:noFill/>
-        </p:spPr>
-        <p:txBody>
-          <a:bodyPr wrap="square">
-            <a:spAutoFit/>
-          </a:bodyPr>
-          <a:lstStyle/>
-          <a:p>
-            <a:pPr algn="l">
-              <a:defRPr sz="1600" b="1">
-                <a:solidFill>
-                  <a:srgbClr val="1E293B"/>
-                </a:solidFill>
-                <a:latin typeface="Calibri"/>
-              </a:defRPr>
-            </a:pPr>
-            <a:r>
-              <a:t>▸ What Didn't Work</a:t>
-            </a:r>
-          </a:p>
-        </p:txBody>
-      </p:sp>
-      <p:sp>
-        <p:nvSpPr>
-          <p:cNvPr id="11" name="TextBox 10"/>
-          <p:cNvSpPr txBox="1"/>
-          <p:nvPr/>
-        </p:nvSpPr>
-        <p:spPr>
-          <a:xfrm>
-            <a:off x="1188720" y="5166360"/>
-            <a:ext cx="9601200" cy="640080"/>
-          </a:xfrm>
-          <a:prstGeom prst="rect">
-            <a:avLst/>
-          </a:prstGeom>
-          <a:noFill/>
-        </p:spPr>
-        <p:txBody>
-          <a:bodyPr wrap="square">
-            <a:spAutoFit/>
-          </a:bodyPr>
-          <a:lstStyle/>
-          <a:p>
-            <a:pPr algn="l">
-              <a:defRPr sz="1400" b="0">
-                <a:solidFill>
-                  <a:srgbClr val="4D4E4E"/>
-                </a:solidFill>
-                <a:latin typeface="Calibri"/>
-              </a:defRPr>
-            </a:pPr>
-            <a:r>
-              <a:t>DeepSeek V3.2 via Terraform foundation_model failed. Fix: lifecycle ignore_changes + manual console config.</a:t>
-            </a:r>
-          </a:p>
-        </p:txBody>
-      </p:sp>
+              <a:t>System Architecture.</a:t>
+            </a:r>
+          </a:p>
+        </p:txBody>
+      </p:sp>
+      <p:pic>
+        <p:nvPicPr>
+          <p:cNvPr id="4" name="Picture 3" descr="w4_architecture.png"/>
+          <p:cNvPicPr>
+            <a:picLocks noChangeAspect="1"/>
+          </p:cNvPicPr>
+          <p:nvPr/>
+        </p:nvPicPr>
+        <p:blipFill>
+          <a:blip r:embed="rId2"/>
+          <a:stretch>
+            <a:fillRect/>
+          </a:stretch>
+        </p:blipFill>
+        <p:spPr>
+          <a:xfrm>
+            <a:off x="274320" y="1463040"/>
+            <a:ext cx="11612880" cy="5960892"/>
+          </a:xfrm>
+          <a:prstGeom prst="rect">
+            <a:avLst/>
+          </a:prstGeom>
+        </p:spPr>
+      </p:pic>
     </p:spTree>
   </p:cSld>
   <p:clrMapOvr>
@@ -5125,8 +6549,8 @@
         </p:nvSpPr>
         <p:spPr>
           <a:xfrm>
-            <a:off x="731520" y="274320"/>
-            <a:ext cx="4572000" cy="365760"/>
+            <a:off x="731520" y="365760"/>
+            <a:ext cx="3657600" cy="274320"/>
           </a:xfrm>
           <a:prstGeom prst="rect">
             <a:avLst/>
@@ -5134,21 +6558,24 @@
           <a:noFill/>
         </p:spPr>
         <p:txBody>
-          <a:bodyPr wrap="square">
+          <a:bodyPr wrap="square" anchor="t">
             <a:spAutoFit/>
           </a:bodyPr>
           <a:lstStyle/>
           <a:p>
             <a:pPr algn="l">
-              <a:defRPr sz="1200" b="1">
+              <a:lnSpc>
+                <a:spcPts val="1200"/>
+              </a:lnSpc>
+              <a:defRPr sz="1000" b="1">
                 <a:solidFill>
                   <a:srgbClr val="FE7624"/>
                 </a:solidFill>
-                <a:latin typeface="Calibri"/>
+                <a:latin typeface="Plus Jakarta Sans"/>
               </a:defRPr>
             </a:pPr>
             <a:r>
-              <a:t>01 • DATA FLOW</a:t>
+              <a:t>01 • DECISIONS</a:t>
             </a:r>
           </a:p>
         </p:txBody>
@@ -5161,8 +6588,8 @@
         </p:nvSpPr>
         <p:spPr>
           <a:xfrm>
-            <a:off x="731520" y="640080"/>
-            <a:ext cx="9144000" cy="548640"/>
+            <a:off x="731520" y="731520"/>
+            <a:ext cx="7315200" cy="548640"/>
           </a:xfrm>
           <a:prstGeom prst="rect">
             <a:avLst/>
@@ -5170,49 +6597,736 @@
           <a:noFill/>
         </p:spPr>
         <p:txBody>
-          <a:bodyPr wrap="square">
+          <a:bodyPr wrap="square" anchor="t">
             <a:spAutoFit/>
           </a:bodyPr>
           <a:lstStyle/>
           <a:p>
             <a:pPr algn="l">
-              <a:defRPr sz="3000" b="1">
+              <a:lnSpc>
+                <a:spcPts val="3300"/>
+              </a:lnSpc>
+              <a:defRPr sz="2800" b="1">
                 <a:solidFill>
                   <a:srgbClr val="1E293B"/>
                 </a:solidFill>
-                <a:latin typeface="Calibri"/>
+                <a:latin typeface="Plus Jakarta Sans"/>
               </a:defRPr>
             </a:pPr>
             <a:r>
-              <a:t>Request Flow &amp; Orchestration Loop</a:t>
-            </a:r>
-          </a:p>
-        </p:txBody>
-      </p:sp>
-      <p:pic>
-        <p:nvPicPr>
-          <p:cNvPr id="4" name="Picture 3" descr="w4_request_flow.png"/>
-          <p:cNvPicPr>
-            <a:picLocks noChangeAspect="1"/>
-          </p:cNvPicPr>
-          <p:nvPr/>
-        </p:nvPicPr>
-        <p:blipFill>
-          <a:blip r:embed="rId2"/>
-          <a:stretch>
-            <a:fillRect/>
-          </a:stretch>
-        </p:blipFill>
-        <p:spPr>
-          <a:xfrm>
-            <a:off x="457200" y="1371600"/>
-            <a:ext cx="11247120" cy="4913352"/>
-          </a:xfrm>
-          <a:prstGeom prst="rect">
-            <a:avLst/>
-          </a:prstGeom>
-        </p:spPr>
-      </p:pic>
+              <a:t>Key Technical Decisions.</a:t>
+            </a:r>
+          </a:p>
+        </p:txBody>
+      </p:sp>
+      <p:sp>
+        <p:nvSpPr>
+          <p:cNvPr id="4" name="Rounded Rectangle 3"/>
+          <p:cNvSpPr/>
+          <p:nvPr/>
+        </p:nvSpPr>
+        <p:spPr>
+          <a:xfrm>
+            <a:off x="731520" y="1554480"/>
+            <a:ext cx="5212080" cy="2011680"/>
+          </a:xfrm>
+          <a:prstGeom prst="roundRect">
+            <a:avLst>
+              <a:gd name="adj" fmla="val 5000"/>
+            </a:avLst>
+          </a:prstGeom>
+          <a:solidFill>
+            <a:srgbClr val="F9FAFB"/>
+          </a:solidFill>
+          <a:ln w="19050">
+            <a:solidFill>
+              <a:srgbClr val="00AC4E"/>
+            </a:solidFill>
+          </a:ln>
+        </p:spPr>
+        <p:style>
+          <a:lnRef idx="1">
+            <a:schemeClr val="accent1"/>
+          </a:lnRef>
+          <a:fillRef idx="3">
+            <a:schemeClr val="accent1"/>
+          </a:fillRef>
+          <a:effectRef idx="2">
+            <a:schemeClr val="accent1"/>
+          </a:effectRef>
+          <a:fontRef idx="minor">
+            <a:schemeClr val="lt1"/>
+          </a:fontRef>
+        </p:style>
+        <p:txBody>
+          <a:bodyPr rtlCol="0" anchor="ctr"/>
+          <a:lstStyle/>
+          <a:p>
+            <a:pPr algn="ctr"/>
+          </a:p>
+        </p:txBody>
+      </p:sp>
+      <p:sp>
+        <p:nvSpPr>
+          <p:cNvPr id="5" name="Rectangle 4"/>
+          <p:cNvSpPr/>
+          <p:nvPr/>
+        </p:nvSpPr>
+        <p:spPr>
+          <a:xfrm>
+            <a:off x="731520" y="1554480"/>
+            <a:ext cx="5212080" cy="63500"/>
+          </a:xfrm>
+          <a:prstGeom prst="rect">
+            <a:avLst/>
+          </a:prstGeom>
+          <a:solidFill>
+            <a:srgbClr val="00AC4E"/>
+          </a:solidFill>
+          <a:ln>
+            <a:noFill/>
+          </a:ln>
+        </p:spPr>
+        <p:style>
+          <a:lnRef idx="1">
+            <a:schemeClr val="accent1"/>
+          </a:lnRef>
+          <a:fillRef idx="3">
+            <a:schemeClr val="accent1"/>
+          </a:fillRef>
+          <a:effectRef idx="2">
+            <a:schemeClr val="accent1"/>
+          </a:effectRef>
+          <a:fontRef idx="minor">
+            <a:schemeClr val="lt1"/>
+          </a:fontRef>
+        </p:style>
+        <p:txBody>
+          <a:bodyPr rtlCol="0" anchor="ctr"/>
+          <a:lstStyle/>
+          <a:p>
+            <a:pPr algn="ctr"/>
+          </a:p>
+        </p:txBody>
+      </p:sp>
+      <p:sp>
+        <p:nvSpPr>
+          <p:cNvPr id="6" name="TextBox 5"/>
+          <p:cNvSpPr txBox="1"/>
+          <p:nvPr/>
+        </p:nvSpPr>
+        <p:spPr>
+          <a:xfrm>
+            <a:off x="914400" y="1783080"/>
+            <a:ext cx="4846320" cy="365760"/>
+          </a:xfrm>
+          <a:prstGeom prst="rect">
+            <a:avLst/>
+          </a:prstGeom>
+          <a:noFill/>
+        </p:spPr>
+        <p:txBody>
+          <a:bodyPr wrap="square" anchor="t">
+            <a:spAutoFit/>
+          </a:bodyPr>
+          <a:lstStyle/>
+          <a:p>
+            <a:pPr algn="l">
+              <a:lnSpc>
+                <a:spcPts val="1400"/>
+              </a:lnSpc>
+              <a:defRPr sz="1200" b="1">
+                <a:solidFill>
+                  <a:srgbClr val="1E293B"/>
+                </a:solidFill>
+                <a:latin typeface="Plus Jakarta Sans"/>
+              </a:defRPr>
+            </a:pPr>
+            <a:r>
+              <a:t>Bedrock Agents vs Custom Pipeline</a:t>
+            </a:r>
+          </a:p>
+        </p:txBody>
+      </p:sp>
+      <p:sp>
+        <p:nvSpPr>
+          <p:cNvPr id="7" name="TextBox 6"/>
+          <p:cNvSpPr txBox="1"/>
+          <p:nvPr/>
+        </p:nvSpPr>
+        <p:spPr>
+          <a:xfrm>
+            <a:off x="914400" y="2148840"/>
+            <a:ext cx="4846320" cy="1280160"/>
+          </a:xfrm>
+          <a:prstGeom prst="rect">
+            <a:avLst/>
+          </a:prstGeom>
+          <a:noFill/>
+        </p:spPr>
+        <p:txBody>
+          <a:bodyPr wrap="square" anchor="t">
+            <a:spAutoFit/>
+          </a:bodyPr>
+          <a:lstStyle/>
+          <a:p>
+            <a:pPr algn="l">
+              <a:lnSpc>
+                <a:spcPts val="1500"/>
+              </a:lnSpc>
+              <a:defRPr sz="1000" b="0">
+                <a:solidFill>
+                  <a:srgbClr val="4D4E4E"/>
+                </a:solidFill>
+                <a:latin typeface="Plus Jakarta Sans"/>
+              </a:defRPr>
+            </a:pPr>
+            <a:r>
+              <a:t>Managed orchestration. Agent handles</a:t>
+            </a:r>
+            <a:br/>
+            <a:r>
+              <a:t>KB retrieval + tool routing automatically.</a:t>
+            </a:r>
+            <a:br/>
+            <a:r>
+              <a:t>Less control, faster to production.</a:t>
+            </a:r>
+          </a:p>
+        </p:txBody>
+      </p:sp>
+      <p:sp>
+        <p:nvSpPr>
+          <p:cNvPr id="8" name="Rounded Rectangle 7"/>
+          <p:cNvSpPr/>
+          <p:nvPr/>
+        </p:nvSpPr>
+        <p:spPr>
+          <a:xfrm>
+            <a:off x="6217920" y="1554480"/>
+            <a:ext cx="5212080" cy="2011680"/>
+          </a:xfrm>
+          <a:prstGeom prst="roundRect">
+            <a:avLst>
+              <a:gd name="adj" fmla="val 5000"/>
+            </a:avLst>
+          </a:prstGeom>
+          <a:solidFill>
+            <a:srgbClr val="F9FAFB"/>
+          </a:solidFill>
+          <a:ln w="19050">
+            <a:solidFill>
+              <a:srgbClr val="007BC1"/>
+            </a:solidFill>
+          </a:ln>
+        </p:spPr>
+        <p:style>
+          <a:lnRef idx="1">
+            <a:schemeClr val="accent1"/>
+          </a:lnRef>
+          <a:fillRef idx="3">
+            <a:schemeClr val="accent1"/>
+          </a:fillRef>
+          <a:effectRef idx="2">
+            <a:schemeClr val="accent1"/>
+          </a:effectRef>
+          <a:fontRef idx="minor">
+            <a:schemeClr val="lt1"/>
+          </a:fontRef>
+        </p:style>
+        <p:txBody>
+          <a:bodyPr rtlCol="0" anchor="ctr"/>
+          <a:lstStyle/>
+          <a:p>
+            <a:pPr algn="ctr"/>
+          </a:p>
+        </p:txBody>
+      </p:sp>
+      <p:sp>
+        <p:nvSpPr>
+          <p:cNvPr id="9" name="Rectangle 8"/>
+          <p:cNvSpPr/>
+          <p:nvPr/>
+        </p:nvSpPr>
+        <p:spPr>
+          <a:xfrm>
+            <a:off x="6217920" y="1554480"/>
+            <a:ext cx="5212080" cy="63500"/>
+          </a:xfrm>
+          <a:prstGeom prst="rect">
+            <a:avLst/>
+          </a:prstGeom>
+          <a:solidFill>
+            <a:srgbClr val="007BC1"/>
+          </a:solidFill>
+          <a:ln>
+            <a:noFill/>
+          </a:ln>
+        </p:spPr>
+        <p:style>
+          <a:lnRef idx="1">
+            <a:schemeClr val="accent1"/>
+          </a:lnRef>
+          <a:fillRef idx="3">
+            <a:schemeClr val="accent1"/>
+          </a:fillRef>
+          <a:effectRef idx="2">
+            <a:schemeClr val="accent1"/>
+          </a:effectRef>
+          <a:fontRef idx="minor">
+            <a:schemeClr val="lt1"/>
+          </a:fontRef>
+        </p:style>
+        <p:txBody>
+          <a:bodyPr rtlCol="0" anchor="ctr"/>
+          <a:lstStyle/>
+          <a:p>
+            <a:pPr algn="ctr"/>
+          </a:p>
+        </p:txBody>
+      </p:sp>
+      <p:sp>
+        <p:nvSpPr>
+          <p:cNvPr id="10" name="TextBox 9"/>
+          <p:cNvSpPr txBox="1"/>
+          <p:nvPr/>
+        </p:nvSpPr>
+        <p:spPr>
+          <a:xfrm>
+            <a:off x="6400800" y="1783080"/>
+            <a:ext cx="4846320" cy="365760"/>
+          </a:xfrm>
+          <a:prstGeom prst="rect">
+            <a:avLst/>
+          </a:prstGeom>
+          <a:noFill/>
+        </p:spPr>
+        <p:txBody>
+          <a:bodyPr wrap="square" anchor="t">
+            <a:spAutoFit/>
+          </a:bodyPr>
+          <a:lstStyle/>
+          <a:p>
+            <a:pPr algn="l">
+              <a:lnSpc>
+                <a:spcPts val="1400"/>
+              </a:lnSpc>
+              <a:defRPr sz="1200" b="1">
+                <a:solidFill>
+                  <a:srgbClr val="1E293B"/>
+                </a:solidFill>
+                <a:latin typeface="Plus Jakarta Sans"/>
+              </a:defRPr>
+            </a:pPr>
+            <a:r>
+              <a:t>VPC Interface Endpoint (No NAT)</a:t>
+            </a:r>
+          </a:p>
+        </p:txBody>
+      </p:sp>
+      <p:sp>
+        <p:nvSpPr>
+          <p:cNvPr id="11" name="TextBox 10"/>
+          <p:cNvSpPr txBox="1"/>
+          <p:nvPr/>
+        </p:nvSpPr>
+        <p:spPr>
+          <a:xfrm>
+            <a:off x="6400800" y="2148840"/>
+            <a:ext cx="4846320" cy="1280160"/>
+          </a:xfrm>
+          <a:prstGeom prst="rect">
+            <a:avLst/>
+          </a:prstGeom>
+          <a:noFill/>
+        </p:spPr>
+        <p:txBody>
+          <a:bodyPr wrap="square" anchor="t">
+            <a:spAutoFit/>
+          </a:bodyPr>
+          <a:lstStyle/>
+          <a:p>
+            <a:pPr algn="l">
+              <a:lnSpc>
+                <a:spcPts val="1500"/>
+              </a:lnSpc>
+              <a:defRPr sz="1000" b="0">
+                <a:solidFill>
+                  <a:srgbClr val="4D4E4E"/>
+                </a:solidFill>
+                <a:latin typeface="Plus Jakarta Sans"/>
+              </a:defRPr>
+            </a:pPr>
+            <a:r>
+              <a:t>VPC Endpoint for execute-api.</a:t>
+            </a:r>
+            <a:br/>
+            <a:r>
+              <a:t>Traffic stays on AWS backbone.</a:t>
+            </a:r>
+            <a:br/>
+            <a:r>
+              <a:t>No NAT Gateway needed — saves cost.</a:t>
+            </a:r>
+          </a:p>
+        </p:txBody>
+      </p:sp>
+      <p:sp>
+        <p:nvSpPr>
+          <p:cNvPr id="12" name="Rounded Rectangle 11"/>
+          <p:cNvSpPr/>
+          <p:nvPr/>
+        </p:nvSpPr>
+        <p:spPr>
+          <a:xfrm>
+            <a:off x="731520" y="3840480"/>
+            <a:ext cx="5212080" cy="2011680"/>
+          </a:xfrm>
+          <a:prstGeom prst="roundRect">
+            <a:avLst>
+              <a:gd name="adj" fmla="val 5000"/>
+            </a:avLst>
+          </a:prstGeom>
+          <a:solidFill>
+            <a:srgbClr val="F9FAFB"/>
+          </a:solidFill>
+          <a:ln w="19050">
+            <a:solidFill>
+              <a:srgbClr val="00B3D9"/>
+            </a:solidFill>
+          </a:ln>
+        </p:spPr>
+        <p:style>
+          <a:lnRef idx="1">
+            <a:schemeClr val="accent1"/>
+          </a:lnRef>
+          <a:fillRef idx="3">
+            <a:schemeClr val="accent1"/>
+          </a:fillRef>
+          <a:effectRef idx="2">
+            <a:schemeClr val="accent1"/>
+          </a:effectRef>
+          <a:fontRef idx="minor">
+            <a:schemeClr val="lt1"/>
+          </a:fontRef>
+        </p:style>
+        <p:txBody>
+          <a:bodyPr rtlCol="0" anchor="ctr"/>
+          <a:lstStyle/>
+          <a:p>
+            <a:pPr algn="ctr"/>
+          </a:p>
+        </p:txBody>
+      </p:sp>
+      <p:sp>
+        <p:nvSpPr>
+          <p:cNvPr id="13" name="Rectangle 12"/>
+          <p:cNvSpPr/>
+          <p:nvPr/>
+        </p:nvSpPr>
+        <p:spPr>
+          <a:xfrm>
+            <a:off x="731520" y="3840480"/>
+            <a:ext cx="5212080" cy="63500"/>
+          </a:xfrm>
+          <a:prstGeom prst="rect">
+            <a:avLst/>
+          </a:prstGeom>
+          <a:solidFill>
+            <a:srgbClr val="00B3D9"/>
+          </a:solidFill>
+          <a:ln>
+            <a:noFill/>
+          </a:ln>
+        </p:spPr>
+        <p:style>
+          <a:lnRef idx="1">
+            <a:schemeClr val="accent1"/>
+          </a:lnRef>
+          <a:fillRef idx="3">
+            <a:schemeClr val="accent1"/>
+          </a:fillRef>
+          <a:effectRef idx="2">
+            <a:schemeClr val="accent1"/>
+          </a:effectRef>
+          <a:fontRef idx="minor">
+            <a:schemeClr val="lt1"/>
+          </a:fontRef>
+        </p:style>
+        <p:txBody>
+          <a:bodyPr rtlCol="0" anchor="ctr"/>
+          <a:lstStyle/>
+          <a:p>
+            <a:pPr algn="ctr"/>
+          </a:p>
+        </p:txBody>
+      </p:sp>
+      <p:sp>
+        <p:nvSpPr>
+          <p:cNvPr id="14" name="TextBox 13"/>
+          <p:cNvSpPr txBox="1"/>
+          <p:nvPr/>
+        </p:nvSpPr>
+        <p:spPr>
+          <a:xfrm>
+            <a:off x="914400" y="4069080"/>
+            <a:ext cx="4846320" cy="365760"/>
+          </a:xfrm>
+          <a:prstGeom prst="rect">
+            <a:avLst/>
+          </a:prstGeom>
+          <a:noFill/>
+        </p:spPr>
+        <p:txBody>
+          <a:bodyPr wrap="square" anchor="t">
+            <a:spAutoFit/>
+          </a:bodyPr>
+          <a:lstStyle/>
+          <a:p>
+            <a:pPr algn="l">
+              <a:lnSpc>
+                <a:spcPts val="1400"/>
+              </a:lnSpc>
+              <a:defRPr sz="1200" b="1">
+                <a:solidFill>
+                  <a:srgbClr val="1E293B"/>
+                </a:solidFill>
+                <a:latin typeface="Plus Jakarta Sans"/>
+              </a:defRPr>
+            </a:pPr>
+            <a:r>
+              <a:t>Lambda Chat Outside VPC</a:t>
+            </a:r>
+          </a:p>
+        </p:txBody>
+      </p:sp>
+      <p:sp>
+        <p:nvSpPr>
+          <p:cNvPr id="15" name="TextBox 14"/>
+          <p:cNvSpPr txBox="1"/>
+          <p:nvPr/>
+        </p:nvSpPr>
+        <p:spPr>
+          <a:xfrm>
+            <a:off x="914400" y="4434840"/>
+            <a:ext cx="4846320" cy="1280160"/>
+          </a:xfrm>
+          <a:prstGeom prst="rect">
+            <a:avLst/>
+          </a:prstGeom>
+          <a:noFill/>
+        </p:spPr>
+        <p:txBody>
+          <a:bodyPr wrap="square" anchor="t">
+            <a:spAutoFit/>
+          </a:bodyPr>
+          <a:lstStyle/>
+          <a:p>
+            <a:pPr algn="l">
+              <a:lnSpc>
+                <a:spcPts val="1500"/>
+              </a:lnSpc>
+              <a:defRPr sz="1000" b="0">
+                <a:solidFill>
+                  <a:srgbClr val="4D4E4E"/>
+                </a:solidFill>
+                <a:latin typeface="Plus Jakarta Sans"/>
+              </a:defRPr>
+            </a:pPr>
+            <a:r>
+              <a:t>No vpc_config — calls Bedrock via</a:t>
+            </a:r>
+            <a:br/>
+            <a:r>
+              <a:t>AWS internal network. Avoids cold</a:t>
+            </a:r>
+            <a:br/>
+            <a:r>
+              <a:t>start ENI delays (5-10s).</a:t>
+            </a:r>
+          </a:p>
+        </p:txBody>
+      </p:sp>
+      <p:sp>
+        <p:nvSpPr>
+          <p:cNvPr id="16" name="Rounded Rectangle 15"/>
+          <p:cNvSpPr/>
+          <p:nvPr/>
+        </p:nvSpPr>
+        <p:spPr>
+          <a:xfrm>
+            <a:off x="6217920" y="3840480"/>
+            <a:ext cx="5212080" cy="2011680"/>
+          </a:xfrm>
+          <a:prstGeom prst="roundRect">
+            <a:avLst>
+              <a:gd name="adj" fmla="val 5000"/>
+            </a:avLst>
+          </a:prstGeom>
+          <a:solidFill>
+            <a:srgbClr val="F9FAFB"/>
+          </a:solidFill>
+          <a:ln w="19050">
+            <a:solidFill>
+              <a:srgbClr val="DC2626"/>
+            </a:solidFill>
+          </a:ln>
+        </p:spPr>
+        <p:style>
+          <a:lnRef idx="1">
+            <a:schemeClr val="accent1"/>
+          </a:lnRef>
+          <a:fillRef idx="3">
+            <a:schemeClr val="accent1"/>
+          </a:fillRef>
+          <a:effectRef idx="2">
+            <a:schemeClr val="accent1"/>
+          </a:effectRef>
+          <a:fontRef idx="minor">
+            <a:schemeClr val="lt1"/>
+          </a:fontRef>
+        </p:style>
+        <p:txBody>
+          <a:bodyPr rtlCol="0" anchor="ctr"/>
+          <a:lstStyle/>
+          <a:p>
+            <a:pPr algn="ctr"/>
+          </a:p>
+        </p:txBody>
+      </p:sp>
+      <p:sp>
+        <p:nvSpPr>
+          <p:cNvPr id="17" name="Rectangle 16"/>
+          <p:cNvSpPr/>
+          <p:nvPr/>
+        </p:nvSpPr>
+        <p:spPr>
+          <a:xfrm>
+            <a:off x="6217920" y="3840480"/>
+            <a:ext cx="5212080" cy="63500"/>
+          </a:xfrm>
+          <a:prstGeom prst="rect">
+            <a:avLst/>
+          </a:prstGeom>
+          <a:solidFill>
+            <a:srgbClr val="DC2626"/>
+          </a:solidFill>
+          <a:ln>
+            <a:noFill/>
+          </a:ln>
+        </p:spPr>
+        <p:style>
+          <a:lnRef idx="1">
+            <a:schemeClr val="accent1"/>
+          </a:lnRef>
+          <a:fillRef idx="3">
+            <a:schemeClr val="accent1"/>
+          </a:fillRef>
+          <a:effectRef idx="2">
+            <a:schemeClr val="accent1"/>
+          </a:effectRef>
+          <a:fontRef idx="minor">
+            <a:schemeClr val="lt1"/>
+          </a:fontRef>
+        </p:style>
+        <p:txBody>
+          <a:bodyPr rtlCol="0" anchor="ctr"/>
+          <a:lstStyle/>
+          <a:p>
+            <a:pPr algn="ctr"/>
+          </a:p>
+        </p:txBody>
+      </p:sp>
+      <p:sp>
+        <p:nvSpPr>
+          <p:cNvPr id="18" name="TextBox 17"/>
+          <p:cNvSpPr txBox="1"/>
+          <p:nvPr/>
+        </p:nvSpPr>
+        <p:spPr>
+          <a:xfrm>
+            <a:off x="6400800" y="4069080"/>
+            <a:ext cx="4846320" cy="365760"/>
+          </a:xfrm>
+          <a:prstGeom prst="rect">
+            <a:avLst/>
+          </a:prstGeom>
+          <a:noFill/>
+        </p:spPr>
+        <p:txBody>
+          <a:bodyPr wrap="square" anchor="t">
+            <a:spAutoFit/>
+          </a:bodyPr>
+          <a:lstStyle/>
+          <a:p>
+            <a:pPr algn="l">
+              <a:lnSpc>
+                <a:spcPts val="1400"/>
+              </a:lnSpc>
+              <a:defRPr sz="1200" b="1">
+                <a:solidFill>
+                  <a:srgbClr val="1E293B"/>
+                </a:solidFill>
+                <a:latin typeface="Plus Jakarta Sans"/>
+              </a:defRPr>
+            </a:pPr>
+            <a:r>
+              <a:t>What Didn't Work</a:t>
+            </a:r>
+          </a:p>
+        </p:txBody>
+      </p:sp>
+      <p:sp>
+        <p:nvSpPr>
+          <p:cNvPr id="19" name="TextBox 18"/>
+          <p:cNvSpPr txBox="1"/>
+          <p:nvPr/>
+        </p:nvSpPr>
+        <p:spPr>
+          <a:xfrm>
+            <a:off x="6400800" y="4434840"/>
+            <a:ext cx="4846320" cy="1280160"/>
+          </a:xfrm>
+          <a:prstGeom prst="rect">
+            <a:avLst/>
+          </a:prstGeom>
+          <a:noFill/>
+        </p:spPr>
+        <p:txBody>
+          <a:bodyPr wrap="square" anchor="t">
+            <a:spAutoFit/>
+          </a:bodyPr>
+          <a:lstStyle/>
+          <a:p>
+            <a:pPr algn="l">
+              <a:lnSpc>
+                <a:spcPts val="1500"/>
+              </a:lnSpc>
+              <a:defRPr sz="1000" b="0">
+                <a:solidFill>
+                  <a:srgbClr val="4D4E4E"/>
+                </a:solidFill>
+                <a:latin typeface="Plus Jakarta Sans"/>
+              </a:defRPr>
+            </a:pPr>
+            <a:r>
+              <a:t>DeepSeek V3.2 via Terraform</a:t>
+            </a:r>
+            <a:br/>
+            <a:r>
+              <a:t>foundation_model param failed.</a:t>
+            </a:r>
+            <a:br/>
+            <a:r>
+              <a:t>Fix: lifecycle { ignore_changes }</a:t>
+            </a:r>
+            <a:br/>
+            <a:r>
+              <a:t>+ manual console config.</a:t>
+            </a:r>
+          </a:p>
+        </p:txBody>
+      </p:sp>
     </p:spTree>
   </p:cSld>
   <p:clrMapOvr>
@@ -5239,8 +7353,8 @@
         </p:nvSpPr>
         <p:spPr>
           <a:xfrm>
-            <a:off x="731520" y="274320"/>
-            <a:ext cx="4572000" cy="365760"/>
+            <a:off x="731520" y="365760"/>
+            <a:ext cx="3657600" cy="274320"/>
           </a:xfrm>
           <a:prstGeom prst="rect">
             <a:avLst/>
@@ -5248,21 +7362,24 @@
           <a:noFill/>
         </p:spPr>
         <p:txBody>
-          <a:bodyPr wrap="square">
+          <a:bodyPr wrap="square" anchor="t">
             <a:spAutoFit/>
           </a:bodyPr>
           <a:lstStyle/>
           <a:p>
             <a:pPr algn="l">
-              <a:defRPr sz="1200" b="1">
+              <a:lnSpc>
+                <a:spcPts val="1200"/>
+              </a:lnSpc>
+              <a:defRPr sz="1000" b="1">
                 <a:solidFill>
                   <a:srgbClr val="FE7624"/>
                 </a:solidFill>
-                <a:latin typeface="Calibri"/>
+                <a:latin typeface="Plus Jakarta Sans"/>
               </a:defRPr>
             </a:pPr>
             <a:r>
-              <a:t>01 • TOOL ROUTING</a:t>
+              <a:t>01 • DATA FLOW</a:t>
             </a:r>
           </a:p>
         </p:txBody>
@@ -5275,7 +7392,7 @@
         </p:nvSpPr>
         <p:spPr>
           <a:xfrm>
-            <a:off x="731520" y="640080"/>
+            <a:off x="731520" y="731520"/>
             <a:ext cx="9144000" cy="548640"/>
           </a:xfrm>
           <a:prstGeom prst="rect">
@@ -5284,28 +7401,31 @@
           <a:noFill/>
         </p:spPr>
         <p:txBody>
-          <a:bodyPr wrap="square">
+          <a:bodyPr wrap="square" anchor="t">
             <a:spAutoFit/>
           </a:bodyPr>
           <a:lstStyle/>
           <a:p>
             <a:pPr algn="l">
-              <a:defRPr sz="3000" b="1">
+              <a:lnSpc>
+                <a:spcPts val="3300"/>
+              </a:lnSpc>
+              <a:defRPr sz="2800" b="1">
                 <a:solidFill>
                   <a:srgbClr val="1E293B"/>
                 </a:solidFill>
-                <a:latin typeface="Calibri"/>
+                <a:latin typeface="Plus Jakarta Sans"/>
               </a:defRPr>
             </a:pPr>
             <a:r>
-              <a:t>Agent Decision Logic — KB vs Tools</a:t>
+              <a:t>Request Flow &amp; Orchestration Loop.</a:t>
             </a:r>
           </a:p>
         </p:txBody>
       </p:sp>
       <p:pic>
         <p:nvPicPr>
-          <p:cNvPr id="4" name="Picture 3" descr="w4_tool_routing.png"/>
+          <p:cNvPr id="4" name="Picture 3" descr="w4_request_flow.png"/>
           <p:cNvPicPr>
             <a:picLocks noChangeAspect="1"/>
           </p:cNvPicPr>
@@ -5319,8 +7439,8 @@
         </p:blipFill>
         <p:spPr>
           <a:xfrm>
-            <a:off x="457200" y="1371600"/>
-            <a:ext cx="11247120" cy="6478689"/>
+            <a:off x="274320" y="1463040"/>
+            <a:ext cx="11612880" cy="5073135"/>
           </a:xfrm>
           <a:prstGeom prst="rect">
             <a:avLst/>
@@ -5353,8 +7473,8 @@
         </p:nvSpPr>
         <p:spPr>
           <a:xfrm>
-            <a:off x="731520" y="274320"/>
-            <a:ext cx="4572000" cy="365760"/>
+            <a:off x="731520" y="365760"/>
+            <a:ext cx="3657600" cy="274320"/>
           </a:xfrm>
           <a:prstGeom prst="rect">
             <a:avLst/>
@@ -5362,21 +7482,24 @@
           <a:noFill/>
         </p:spPr>
         <p:txBody>
-          <a:bodyPr wrap="square">
+          <a:bodyPr wrap="square" anchor="t">
             <a:spAutoFit/>
           </a:bodyPr>
           <a:lstStyle/>
           <a:p>
             <a:pPr algn="l">
-              <a:defRPr sz="1200" b="1">
-                <a:solidFill>
-                  <a:srgbClr val="00AC4E"/>
-                </a:solidFill>
-                <a:latin typeface="Calibri"/>
+              <a:lnSpc>
+                <a:spcPts val="1200"/>
+              </a:lnSpc>
+              <a:defRPr sz="1000" b="1">
+                <a:solidFill>
+                  <a:srgbClr val="FE7624"/>
+                </a:solidFill>
+                <a:latin typeface="Plus Jakarta Sans"/>
               </a:defRPr>
             </a:pPr>
             <a:r>
-              <a:t>03 • DEMO L1</a:t>
+              <a:t>01 • TOOL ROUTING</a:t>
             </a:r>
           </a:p>
         </p:txBody>
@@ -5389,7 +7512,7 @@
         </p:nvSpPr>
         <p:spPr>
           <a:xfrm>
-            <a:off x="731520" y="640080"/>
+            <a:off x="731520" y="731520"/>
             <a:ext cx="9144000" cy="548640"/>
           </a:xfrm>
           <a:prstGeom prst="rect">
@@ -5398,64 +7521,31 @@
           <a:noFill/>
         </p:spPr>
         <p:txBody>
-          <a:bodyPr wrap="square">
+          <a:bodyPr wrap="square" anchor="t">
             <a:spAutoFit/>
           </a:bodyPr>
           <a:lstStyle/>
           <a:p>
             <a:pPr algn="l">
-              <a:defRPr sz="3000" b="1">
+              <a:lnSpc>
+                <a:spcPts val="3300"/>
+              </a:lnSpc>
+              <a:defRPr sz="2800" b="1">
                 <a:solidFill>
                   <a:srgbClr val="1E293B"/>
                 </a:solidFill>
-                <a:latin typeface="Calibri"/>
+                <a:latin typeface="Plus Jakarta Sans"/>
               </a:defRPr>
             </a:pPr>
             <a:r>
-              <a:t>L1 — Simple RAG (Retrieval)</a:t>
-            </a:r>
-          </a:p>
-        </p:txBody>
-      </p:sp>
-      <p:sp>
-        <p:nvSpPr>
-          <p:cNvPr id="4" name="TextBox 3"/>
-          <p:cNvSpPr txBox="1"/>
-          <p:nvPr/>
-        </p:nvSpPr>
-        <p:spPr>
-          <a:xfrm>
-            <a:off x="731520" y="1188720"/>
-            <a:ext cx="9144000" cy="457200"/>
-          </a:xfrm>
-          <a:prstGeom prst="rect">
-            <a:avLst/>
-          </a:prstGeom>
-          <a:noFill/>
-        </p:spPr>
-        <p:txBody>
-          <a:bodyPr wrap="square">
-            <a:spAutoFit/>
-          </a:bodyPr>
-          <a:lstStyle/>
-          <a:p>
-            <a:pPr algn="l">
-              <a:defRPr sz="1400" b="0">
-                <a:solidFill>
-                  <a:srgbClr val="4D4E4E"/>
-                </a:solidFill>
-                <a:latin typeface="Calibri"/>
-              </a:defRPr>
-            </a:pPr>
-            <a:r>
-              <a:t>Single-doc retrieval with source citation. KB: 36 markdown docs → Titan Embed v2 → OpenSearch Serverless</a:t>
+              <a:t>Agent Decision Logic — KB vs Tools.</a:t>
             </a:r>
           </a:p>
         </p:txBody>
       </p:sp>
       <p:pic>
         <p:nvPicPr>
-          <p:cNvPr id="5" name="Picture 4" descr="l1_answer.png"/>
+          <p:cNvPr id="4" name="Picture 3" descr="w4_tool_routing.png"/>
           <p:cNvPicPr>
             <a:picLocks noChangeAspect="1"/>
           </p:cNvPicPr>
@@ -5469,32 +7559,8 @@
         </p:blipFill>
         <p:spPr>
           <a:xfrm>
-            <a:off x="457200" y="1828800"/>
-            <a:ext cx="5486400" cy="6295072"/>
-          </a:xfrm>
-          <a:prstGeom prst="rect">
-            <a:avLst/>
-          </a:prstGeom>
-        </p:spPr>
-      </p:pic>
-      <p:pic>
-        <p:nvPicPr>
-          <p:cNvPr id="6" name="Picture 5" descr="l1_proof.png"/>
-          <p:cNvPicPr>
-            <a:picLocks noChangeAspect="1"/>
-          </p:cNvPicPr>
-          <p:nvPr/>
-        </p:nvPicPr>
-        <p:blipFill>
-          <a:blip r:embed="rId3"/>
-          <a:stretch>
-            <a:fillRect/>
-          </a:stretch>
-        </p:blipFill>
-        <p:spPr>
-          <a:xfrm>
-            <a:off x="6217920" y="1828800"/>
-            <a:ext cx="5486400" cy="7741486"/>
+            <a:off x="274320" y="1463040"/>
+            <a:ext cx="11612880" cy="6689378"/>
           </a:xfrm>
           <a:prstGeom prst="rect">
             <a:avLst/>
@@ -5512,6 +7578,14 @@
 <file path=ppt/slides/slide8.xml><?xml version="1.0" encoding="utf-8"?>
 <p:sld xmlns:a="http://schemas.openxmlformats.org/drawingml/2006/main" xmlns:p="http://schemas.openxmlformats.org/presentationml/2006/main" xmlns:r="http://schemas.openxmlformats.org/officeDocument/2006/relationships">
   <p:cSld>
+    <p:bg>
+      <p:bgPr>
+        <a:solidFill>
+          <a:srgbClr val="1E293B"/>
+        </a:solidFill>
+        <a:effectLst/>
+      </p:bgPr>
+    </p:bg>
     <p:spTree>
       <p:nvGrpSpPr>
         <p:cNvPr id="1" name=""/>
@@ -5527,8 +7601,8 @@
         </p:nvSpPr>
         <p:spPr>
           <a:xfrm>
-            <a:off x="731520" y="274320"/>
-            <a:ext cx="4572000" cy="365760"/>
+            <a:off x="731520" y="914400"/>
+            <a:ext cx="4572000" cy="2743200"/>
           </a:xfrm>
           <a:prstGeom prst="rect">
             <a:avLst/>
@@ -5536,21 +7610,24 @@
           <a:noFill/>
         </p:spPr>
         <p:txBody>
-          <a:bodyPr wrap="square">
+          <a:bodyPr wrap="square" anchor="t">
             <a:spAutoFit/>
           </a:bodyPr>
           <a:lstStyle/>
           <a:p>
             <a:pPr algn="l">
-              <a:defRPr sz="1200" b="1">
-                <a:solidFill>
-                  <a:srgbClr val="007BC1"/>
-                </a:solidFill>
-                <a:latin typeface="Calibri"/>
+              <a:lnSpc>
+                <a:spcPts val="14400"/>
+              </a:lnSpc>
+              <a:defRPr sz="12000" b="1">
+                <a:solidFill>
+                  <a:srgbClr val="2D3A55"/>
+                </a:solidFill>
+                <a:latin typeface="Plus Jakarta Sans"/>
               </a:defRPr>
             </a:pPr>
             <a:r>
-              <a:t>03 • DEMO L2</a:t>
+              <a:t>03</a:t>
             </a:r>
           </a:p>
         </p:txBody>
@@ -5563,8 +7640,8 @@
         </p:nvSpPr>
         <p:spPr>
           <a:xfrm>
-            <a:off x="731520" y="640080"/>
-            <a:ext cx="9144000" cy="548640"/>
+            <a:off x="731520" y="914400"/>
+            <a:ext cx="3657600" cy="274320"/>
           </a:xfrm>
           <a:prstGeom prst="rect">
             <a:avLst/>
@@ -5572,21 +7649,24 @@
           <a:noFill/>
         </p:spPr>
         <p:txBody>
-          <a:bodyPr wrap="square">
+          <a:bodyPr wrap="square" anchor="t">
             <a:spAutoFit/>
           </a:bodyPr>
           <a:lstStyle/>
           <a:p>
             <a:pPr algn="l">
-              <a:defRPr sz="3000" b="1">
-                <a:solidFill>
-                  <a:srgbClr val="1E293B"/>
-                </a:solidFill>
-                <a:latin typeface="Calibri"/>
+              <a:lnSpc>
+                <a:spcPts val="1200"/>
+              </a:lnSpc>
+              <a:defRPr sz="1000" b="1">
+                <a:solidFill>
+                  <a:srgbClr val="FBAE42"/>
+                </a:solidFill>
+                <a:latin typeface="Plus Jakarta Sans"/>
               </a:defRPr>
             </a:pPr>
             <a:r>
-              <a:t>L2 — Multi-Source Retrieval</a:t>
+              <a:t>PART 03</a:t>
             </a:r>
           </a:p>
         </p:txBody>
@@ -5599,8 +7679,8 @@
         </p:nvSpPr>
         <p:spPr>
           <a:xfrm>
-            <a:off x="731520" y="1188720"/>
-            <a:ext cx="9144000" cy="457200"/>
+            <a:off x="731520" y="3200400"/>
+            <a:ext cx="9144000" cy="1097280"/>
           </a:xfrm>
           <a:prstGeom prst="rect">
             <a:avLst/>
@@ -5608,73 +7688,67 @@
           <a:noFill/>
         </p:spPr>
         <p:txBody>
-          <a:bodyPr wrap="square">
+          <a:bodyPr wrap="square" anchor="t">
             <a:spAutoFit/>
           </a:bodyPr>
           <a:lstStyle/>
           <a:p>
             <a:pPr algn="l">
-              <a:defRPr sz="1400" b="0">
-                <a:solidFill>
-                  <a:srgbClr val="4D4E4E"/>
-                </a:solidFill>
-                <a:latin typeface="Calibri"/>
+              <a:lnSpc>
+                <a:spcPts val="4800"/>
+              </a:lnSpc>
+              <a:defRPr sz="4000" b="1">
+                <a:solidFill>
+                  <a:srgbClr val="FFFFFF"/>
+                </a:solidFill>
+                <a:latin typeface="Plus Jakarta Sans"/>
               </a:defRPr>
             </a:pPr>
             <a:r>
-              <a:t>Multi-doc synthesis &amp; conflict resolution. Agent prefers most recent version (status='current' over 'archived')</a:t>
-            </a:r>
-          </a:p>
-        </p:txBody>
-      </p:sp>
-      <p:pic>
-        <p:nvPicPr>
-          <p:cNvPr id="5" name="Picture 4" descr="l2_answer.png"/>
-          <p:cNvPicPr>
-            <a:picLocks noChangeAspect="1"/>
-          </p:cNvPicPr>
-          <p:nvPr/>
-        </p:nvPicPr>
-        <p:blipFill>
-          <a:blip r:embed="rId2"/>
-          <a:stretch>
-            <a:fillRect/>
-          </a:stretch>
-        </p:blipFill>
-        <p:spPr>
-          <a:xfrm>
-            <a:off x="457200" y="1828800"/>
-            <a:ext cx="5486400" cy="6272212"/>
-          </a:xfrm>
-          <a:prstGeom prst="rect">
-            <a:avLst/>
-          </a:prstGeom>
-        </p:spPr>
-      </p:pic>
-      <p:pic>
-        <p:nvPicPr>
-          <p:cNvPr id="6" name="Picture 5" descr="l2_proof.png"/>
-          <p:cNvPicPr>
-            <a:picLocks noChangeAspect="1"/>
-          </p:cNvPicPr>
-          <p:nvPr/>
-        </p:nvPicPr>
-        <p:blipFill>
-          <a:blip r:embed="rId3"/>
-          <a:stretch>
-            <a:fillRect/>
-          </a:stretch>
-        </p:blipFill>
-        <p:spPr>
-          <a:xfrm>
-            <a:off x="6217920" y="1828800"/>
-            <a:ext cx="5486400" cy="9420598"/>
-          </a:xfrm>
-          <a:prstGeom prst="rect">
-            <a:avLst/>
-          </a:prstGeom>
-        </p:spPr>
-      </p:pic>
+              <a:t>Live Demo.</a:t>
+            </a:r>
+          </a:p>
+        </p:txBody>
+      </p:sp>
+      <p:sp>
+        <p:nvSpPr>
+          <p:cNvPr id="5" name="TextBox 4"/>
+          <p:cNvSpPr txBox="1"/>
+          <p:nvPr/>
+        </p:nvSpPr>
+        <p:spPr>
+          <a:xfrm>
+            <a:off x="731520" y="4572000"/>
+            <a:ext cx="7315200" cy="731520"/>
+          </a:xfrm>
+          <a:prstGeom prst="rect">
+            <a:avLst/>
+          </a:prstGeom>
+          <a:noFill/>
+        </p:spPr>
+        <p:txBody>
+          <a:bodyPr wrap="square" anchor="t">
+            <a:spAutoFit/>
+          </a:bodyPr>
+          <a:lstStyle/>
+          <a:p>
+            <a:pPr algn="l">
+              <a:lnSpc>
+                <a:spcPts val="1900"/>
+              </a:lnSpc>
+              <a:defRPr sz="1600" b="0">
+                <a:solidFill>
+                  <a:srgbClr val="C4D5DD"/>
+                </a:solidFill>
+                <a:latin typeface="Plus Jakarta Sans"/>
+              </a:defRPr>
+            </a:pPr>
+            <a:r>
+              <a:t>L1 → L2 → L3 → L4 — progressive levels of AI capability.</a:t>
+            </a:r>
+          </a:p>
+        </p:txBody>
+      </p:sp>
     </p:spTree>
   </p:cSld>
   <p:clrMapOvr>
@@ -5701,8 +7775,8 @@
         </p:nvSpPr>
         <p:spPr>
           <a:xfrm>
-            <a:off x="731520" y="274320"/>
-            <a:ext cx="4572000" cy="365760"/>
+            <a:off x="731520" y="365760"/>
+            <a:ext cx="4572000" cy="274320"/>
           </a:xfrm>
           <a:prstGeom prst="rect">
             <a:avLst/>
@@ -5710,21 +7784,24 @@
           <a:noFill/>
         </p:spPr>
         <p:txBody>
-          <a:bodyPr wrap="square">
+          <a:bodyPr wrap="square" anchor="t">
             <a:spAutoFit/>
           </a:bodyPr>
           <a:lstStyle/>
           <a:p>
             <a:pPr algn="l">
-              <a:defRPr sz="1200" b="1">
-                <a:solidFill>
-                  <a:srgbClr val="FE7624"/>
-                </a:solidFill>
-                <a:latin typeface="Calibri"/>
+              <a:lnSpc>
+                <a:spcPts val="1200"/>
+              </a:lnSpc>
+              <a:defRPr sz="1000" b="1">
+                <a:solidFill>
+                  <a:srgbClr val="00AC4E"/>
+                </a:solidFill>
+                <a:latin typeface="Plus Jakarta Sans"/>
               </a:defRPr>
             </a:pPr>
             <a:r>
-              <a:t>03 • DEMO L3</a:t>
+              <a:t>L1 • RAG</a:t>
             </a:r>
           </a:p>
         </p:txBody>
@@ -5737,8 +7814,8 @@
         </p:nvSpPr>
         <p:spPr>
           <a:xfrm>
-            <a:off x="731520" y="640080"/>
-            <a:ext cx="9144000" cy="548640"/>
+            <a:off x="731520" y="731520"/>
+            <a:ext cx="9144000" cy="457200"/>
           </a:xfrm>
           <a:prstGeom prst="rect">
             <a:avLst/>
@@ -5746,21 +7823,24 @@
           <a:noFill/>
         </p:spPr>
         <p:txBody>
-          <a:bodyPr wrap="square">
+          <a:bodyPr wrap="square" anchor="t">
             <a:spAutoFit/>
           </a:bodyPr>
           <a:lstStyle/>
           <a:p>
             <a:pPr algn="l">
-              <a:defRPr sz="3000" b="1">
+              <a:lnSpc>
+                <a:spcPts val="3100"/>
+              </a:lnSpc>
+              <a:defRPr sz="2600" b="1">
                 <a:solidFill>
                   <a:srgbClr val="1E293B"/>
                 </a:solidFill>
-                <a:latin typeface="Calibri"/>
+                <a:latin typeface="Plus Jakarta Sans"/>
               </a:defRPr>
             </a:pPr>
             <a:r>
-              <a:t>L3 — Tool-Augmented RAG</a:t>
+              <a:t>L1 — Simple RAG (Retrieval).</a:t>
             </a:r>
           </a:p>
         </p:txBody>
@@ -5773,8 +7853,8 @@
         </p:nvSpPr>
         <p:spPr>
           <a:xfrm>
-            <a:off x="731520" y="1188720"/>
-            <a:ext cx="9144000" cy="457200"/>
+            <a:off x="731520" y="1234440"/>
+            <a:ext cx="10058400" cy="457200"/>
           </a:xfrm>
           <a:prstGeom prst="rect">
             <a:avLst/>
@@ -5782,28 +7862,31 @@
           <a:noFill/>
         </p:spPr>
         <p:txBody>
-          <a:bodyPr wrap="square">
+          <a:bodyPr wrap="square" anchor="t">
             <a:spAutoFit/>
           </a:bodyPr>
           <a:lstStyle/>
           <a:p>
             <a:pPr algn="l">
-              <a:defRPr sz="1400" b="0">
+              <a:lnSpc>
+                <a:spcPts val="1400"/>
+              </a:lnSpc>
+              <a:defRPr sz="1200" b="0">
                 <a:solidFill>
                   <a:srgbClr val="4D4E4E"/>
                 </a:solidFill>
-                <a:latin typeface="Calibri"/>
+                <a:latin typeface="Plus Jakarta Sans"/>
               </a:defRPr>
             </a:pPr>
             <a:r>
-              <a:t>6 tools: query_database, get_service_metrics, get_service_status, list_services, get_incident_history, compare_services</a:t>
+              <a:t>36 markdown docs → Titan Embed v2 (1024d) → OpenSearch Serverless → top-K chunks → answer + source citation</a:t>
             </a:r>
           </a:p>
         </p:txBody>
       </p:sp>
       <p:pic>
         <p:nvPicPr>
-          <p:cNvPr id="5" name="Picture 4" descr="l3_answer.png"/>
+          <p:cNvPr id="5" name="Picture 4" descr="l1_answer.png"/>
           <p:cNvPicPr>
             <a:picLocks noChangeAspect="1"/>
           </p:cNvPicPr>
@@ -5817,8 +7900,8 @@
         </p:blipFill>
         <p:spPr>
           <a:xfrm>
-            <a:off x="457200" y="1828800"/>
-            <a:ext cx="5486400" cy="6772275"/>
+            <a:off x="365760" y="1828800"/>
+            <a:ext cx="5669280" cy="6504908"/>
           </a:xfrm>
           <a:prstGeom prst="rect">
             <a:avLst/>
@@ -5827,7 +7910,7 @@
       </p:pic>
       <p:pic>
         <p:nvPicPr>
-          <p:cNvPr id="6" name="Picture 5" descr="l3_proof.png"/>
+          <p:cNvPr id="6" name="Picture 5" descr="l1_proof.png"/>
           <p:cNvPicPr>
             <a:picLocks noChangeAspect="1"/>
           </p:cNvPicPr>
@@ -5842,7 +7925,7 @@
         <p:spPr>
           <a:xfrm>
             <a:off x="6217920" y="1828800"/>
-            <a:ext cx="5486400" cy="9853574"/>
+            <a:ext cx="5669280" cy="7999536"/>
           </a:xfrm>
           <a:prstGeom prst="rect">
             <a:avLst/>

--- a/slides/W4_presentation.pptx
+++ b/slides/W4_presentation.pptx
@@ -3352,7 +3352,7 @@
               </a:defRPr>
             </a:pPr>
             <a:r>
-              <a:t>Le Hoang Trung Kien  •  Tran Dinh Bao Long  •  Nguyen Duc Chinh</a:t>
+              <a:t>Le Hoang Trung Kien  •  Tran Dinh Bao Long  •  Nguyen Duc Chinh  •  Nguyen Huu Dinh</a:t>
             </a:r>
           </a:p>
           <a:p>
@@ -3368,7 +3368,7 @@
               </a:defRPr>
             </a:pPr>
             <a:r>
-              <a:t>Nguyen Huu Dinh  •  Truong Thi My Quyen  •  Tran Van Duc  •  Hoang Trong Tan</a:t>
+              <a:t>Truong Thi My Quyen  •  Tran Van Duc  •  Hoang Trong Tan  •  Le Duy Khanh</a:t>
             </a:r>
           </a:p>
           <a:p>

--- a/slides/W4_presentation.pptx
+++ b/slides/W4_presentation.pptx
@@ -3570,7 +3570,7 @@
         <p:spPr>
           <a:xfrm>
             <a:off x="365760" y="1828800"/>
-            <a:ext cx="5669280" cy="6481286"/>
+            <a:ext cx="3999198" cy="4572000"/>
           </a:xfrm>
           <a:prstGeom prst="rect">
             <a:avLst/>
@@ -3594,7 +3594,7 @@
         <p:spPr>
           <a:xfrm>
             <a:off x="6217920" y="1828800"/>
-            <a:ext cx="5669280" cy="9734618"/>
+            <a:ext cx="2662656" cy="4572000"/>
           </a:xfrm>
           <a:prstGeom prst="rect">
             <a:avLst/>
@@ -3753,7 +3753,7 @@
         <p:spPr>
           <a:xfrm>
             <a:off x="365760" y="1828800"/>
-            <a:ext cx="5669280" cy="6998018"/>
+            <a:ext cx="3703898" cy="4572000"/>
           </a:xfrm>
           <a:prstGeom prst="rect">
             <a:avLst/>
@@ -3777,7 +3777,7 @@
         <p:spPr>
           <a:xfrm>
             <a:off x="6217920" y="1828800"/>
-            <a:ext cx="5669280" cy="10182027"/>
+            <a:ext cx="2545657" cy="4572000"/>
           </a:xfrm>
           <a:prstGeom prst="rect">
             <a:avLst/>
@@ -3936,7 +3936,7 @@
         <p:spPr>
           <a:xfrm>
             <a:off x="1371600" y="1828800"/>
-            <a:ext cx="9418320" cy="32767274"/>
+            <a:ext cx="1314133" cy="4572000"/>
           </a:xfrm>
           <a:prstGeom prst="rect">
             <a:avLst/>
@@ -4095,7 +4095,7 @@
         <p:spPr>
           <a:xfrm>
             <a:off x="1097280" y="1828800"/>
-            <a:ext cx="9875520" cy="11865587"/>
+            <a:ext cx="3805195" cy="4572000"/>
           </a:xfrm>
           <a:prstGeom prst="rect">
             <a:avLst/>
@@ -6516,7 +6516,7 @@
         <p:spPr>
           <a:xfrm>
             <a:off x="274320" y="1463040"/>
-            <a:ext cx="11612880" cy="5960892"/>
+            <a:ext cx="9797777" cy="5029200"/>
           </a:xfrm>
           <a:prstGeom prst="rect">
             <a:avLst/>
@@ -7440,7 +7440,7 @@
         <p:spPr>
           <a:xfrm>
             <a:off x="274320" y="1463040"/>
-            <a:ext cx="11612880" cy="5073135"/>
+            <a:ext cx="11512308" cy="5029200"/>
           </a:xfrm>
           <a:prstGeom prst="rect">
             <a:avLst/>
@@ -7560,7 +7560,7 @@
         <p:spPr>
           <a:xfrm>
             <a:off x="274320" y="1463040"/>
-            <a:ext cx="11612880" cy="6689378"/>
+            <a:ext cx="8730781" cy="5029200"/>
           </a:xfrm>
           <a:prstGeom prst="rect">
             <a:avLst/>
@@ -7901,7 +7901,7 @@
         <p:spPr>
           <a:xfrm>
             <a:off x="365760" y="1828800"/>
-            <a:ext cx="5669280" cy="6504908"/>
+            <a:ext cx="3984675" cy="4572000"/>
           </a:xfrm>
           <a:prstGeom prst="rect">
             <a:avLst/>
@@ -7925,7 +7925,7 @@
         <p:spPr>
           <a:xfrm>
             <a:off x="6217920" y="1828800"/>
-            <a:ext cx="5669280" cy="7999536"/>
+            <a:ext cx="3240181" cy="4572000"/>
           </a:xfrm>
           <a:prstGeom prst="rect">
             <a:avLst/>

--- a/slides/W4_presentation.pptx
+++ b/slides/W4_presentation.pptx
@@ -3570,7 +3570,7 @@
         <p:spPr>
           <a:xfrm>
             <a:off x="365760" y="1828800"/>
-            <a:ext cx="3999198" cy="4572000"/>
+            <a:ext cx="5669280" cy="3188970"/>
           </a:xfrm>
           <a:prstGeom prst="rect">
             <a:avLst/>
@@ -3594,7 +3594,7 @@
         <p:spPr>
           <a:xfrm>
             <a:off x="6217920" y="1828800"/>
-            <a:ext cx="2662656" cy="4572000"/>
+            <a:ext cx="5669280" cy="3187709"/>
           </a:xfrm>
           <a:prstGeom prst="rect">
             <a:avLst/>
@@ -3753,7 +3753,7 @@
         <p:spPr>
           <a:xfrm>
             <a:off x="365760" y="1828800"/>
-            <a:ext cx="3703898" cy="4572000"/>
+            <a:ext cx="5669280" cy="3188970"/>
           </a:xfrm>
           <a:prstGeom prst="rect">
             <a:avLst/>
@@ -3777,7 +3777,7 @@
         <p:spPr>
           <a:xfrm>
             <a:off x="6217920" y="1828800"/>
-            <a:ext cx="2545657" cy="4572000"/>
+            <a:ext cx="5669280" cy="3186135"/>
           </a:xfrm>
           <a:prstGeom prst="rect">
             <a:avLst/>
@@ -3936,7 +3936,7 @@
         <p:spPr>
           <a:xfrm>
             <a:off x="1371600" y="1828800"/>
-            <a:ext cx="1314133" cy="4572000"/>
+            <a:ext cx="8136721" cy="4572000"/>
           </a:xfrm>
           <a:prstGeom prst="rect">
             <a:avLst/>
@@ -4095,7 +4095,7 @@
         <p:spPr>
           <a:xfrm>
             <a:off x="1097280" y="1828800"/>
-            <a:ext cx="3805195" cy="4572000"/>
+            <a:ext cx="8133477" cy="4572000"/>
           </a:xfrm>
           <a:prstGeom prst="rect">
             <a:avLst/>
@@ -7901,7 +7901,7 @@
         <p:spPr>
           <a:xfrm>
             <a:off x="365760" y="1828800"/>
-            <a:ext cx="3984675" cy="4572000"/>
+            <a:ext cx="5669280" cy="3188970"/>
           </a:xfrm>
           <a:prstGeom prst="rect">
             <a:avLst/>
@@ -7925,7 +7925,7 @@
         <p:spPr>
           <a:xfrm>
             <a:off x="6217920" y="1828800"/>
-            <a:ext cx="3240181" cy="4572000"/>
+            <a:ext cx="5669280" cy="3187709"/>
           </a:xfrm>
           <a:prstGeom prst="rect">
             <a:avLst/>
